--- a/output/FemaleDiseasePrevalence.pptx
+++ b/output/FemaleDiseasePrevalence.pptx
@@ -4,19 +4,21 @@
   <p:sldMasterIdLst>
     <p:sldMasterId id="2147483648" r:id="rId1"/>
   </p:sldMasterIdLst>
+  <p:notesMasterIdLst>
+    <p:notesMasterId r:id="rId11"/>
+  </p:notesMasterIdLst>
   <p:sldIdLst>
-    <p:sldId id="256" r:id="rId7"/>
-    <p:sldId id="257" r:id="rId8"/>
-    <p:sldId id="258" r:id="rId9"/>
-    <p:sldId id="259" r:id="rId10"/>
-    <p:sldId id="260" r:id="rId11"/>
-    <p:sldId id="261" r:id="rId12"/>
-    <p:sldId id="262" r:id="rId13"/>
-    <p:sldId id="263" r:id="rId14"/>
-    <p:sldId id="264" r:id="rId15"/>
-    <p:sldId id="265" r:id="rId16"/>
+    <p:sldId id="256" r:id="rId2"/>
+    <p:sldId id="259" r:id="rId3"/>
+    <p:sldId id="270" r:id="rId4"/>
+    <p:sldId id="266" r:id="rId5"/>
+    <p:sldId id="267" r:id="rId6"/>
+    <p:sldId id="268" r:id="rId7"/>
+    <p:sldId id="269" r:id="rId8"/>
+    <p:sldId id="264" r:id="rId9"/>
+    <p:sldId id="265" r:id="rId10"/>
   </p:sldIdLst>
-  <p:sldSz cx="12191695" cy="6858000" type="screen4x3"/>
+  <p:sldSz cx="12192000" cy="6858000"/>
   <p:notesSz cx="6858000" cy="9144000"/>
   <p:defaultTextStyle>
     <a:defPPr>
@@ -113,187 +115,457 @@
       </a:defRPr>
     </a:lvl9pPr>
   </p:defaultTextStyle>
+  <p:extLst>
+    <p:ext uri="{EFAFB233-063F-42B5-8137-9DF3F51BA10A}">
+      <p15:sldGuideLst xmlns:p15="http://schemas.microsoft.com/office/powerpoint/2012/main">
+        <p15:guide id="1" orient="horz" pos="2160">
+          <p15:clr>
+            <a:srgbClr val="A4A3A4"/>
+          </p15:clr>
+        </p15:guide>
+        <p15:guide id="2" pos="2880">
+          <p15:clr>
+            <a:srgbClr val="A4A3A4"/>
+          </p15:clr>
+        </p15:guide>
+      </p15:sldGuideLst>
+    </p:ext>
+  </p:extLst>
 </p:presentation>
 </file>
 
-<file path=ppt/charts/chart1.xml><?xml version="1.0" encoding="utf-8"?>
-<c:chartSpace xmlns:c="http://schemas.openxmlformats.org/drawingml/2006/chart" xmlns:a="http://schemas.openxmlformats.org/drawingml/2006/main" xmlns:r="http://schemas.openxmlformats.org/officeDocument/2006/relationships">
-  <c:date1904 val="0"/>
-  <c:chart>
-    <c:autoTitleDeleted val="1"/>
-    <c:plotArea>
-      <c:barChart>
-        <c:barDir val="bar"/>
-        <c:grouping val="clustered"/>
-        <c:ser>
-          <c:idx val="0"/>
-          <c:order val="0"/>
-          <c:tx>
-            <c:strRef>
-              <c:f>Sheet1!$B$1</c:f>
-              <c:strCache>
-                <c:ptCount val="1"/>
-                <c:pt idx="0">
-                  <c:v>Female-to-male ratio</c:v>
-                </c:pt>
-              </c:strCache>
-            </c:strRef>
-          </c:tx>
-          <c:spPr>
+<file path=ppt/notesMasters/notesMaster1.xml><?xml version="1.0" encoding="utf-8"?>
+<p:notesMaster xmlns:a="http://schemas.openxmlformats.org/drawingml/2006/main" xmlns:r="http://schemas.openxmlformats.org/officeDocument/2006/relationships" xmlns:p="http://schemas.openxmlformats.org/presentationml/2006/main">
+  <p:cSld>
+    <p:bg>
+      <p:bgRef idx="1001">
+        <a:schemeClr val="bg1"/>
+      </p:bgRef>
+    </p:bg>
+    <p:spTree>
+      <p:nvGrpSpPr>
+        <p:cNvPr id="1" name=""/>
+        <p:cNvGrpSpPr/>
+        <p:nvPr/>
+      </p:nvGrpSpPr>
+      <p:grpSpPr>
+        <a:xfrm>
+          <a:off x="0" y="0"/>
+          <a:ext cx="0" cy="0"/>
+          <a:chOff x="0" y="0"/>
+          <a:chExt cx="0" cy="0"/>
+        </a:xfrm>
+      </p:grpSpPr>
+      <p:sp>
+        <p:nvSpPr>
+          <p:cNvPr id="2" name="Header Placeholder 1"/>
+          <p:cNvSpPr>
+            <a:spLocks noGrp="1"/>
+          </p:cNvSpPr>
+          <p:nvPr>
+            <p:ph type="hdr" sz="quarter"/>
+          </p:nvPr>
+        </p:nvSpPr>
+        <p:spPr>
+          <a:xfrm>
+            <a:off x="0" y="0"/>
+            <a:ext cx="2971800" cy="458788"/>
+          </a:xfrm>
+          <a:prstGeom prst="rect">
+            <a:avLst/>
+          </a:prstGeom>
+        </p:spPr>
+        <p:txBody>
+          <a:bodyPr vert="horz" lIns="91440" tIns="45720" rIns="91440" bIns="45720" rtlCol="0"/>
+          <a:lstStyle>
+            <a:lvl1pPr algn="l">
+              <a:defRPr sz="1200"/>
+            </a:lvl1pPr>
+          </a:lstStyle>
+          <a:p>
+            <a:endParaRPr lang="en-GB"/>
+          </a:p>
+        </p:txBody>
+      </p:sp>
+      <p:sp>
+        <p:nvSpPr>
+          <p:cNvPr id="3" name="Date Placeholder 2"/>
+          <p:cNvSpPr>
+            <a:spLocks noGrp="1"/>
+          </p:cNvSpPr>
+          <p:nvPr>
+            <p:ph type="dt" idx="1"/>
+          </p:nvPr>
+        </p:nvSpPr>
+        <p:spPr>
+          <a:xfrm>
+            <a:off x="3884613" y="0"/>
+            <a:ext cx="2971800" cy="458788"/>
+          </a:xfrm>
+          <a:prstGeom prst="rect">
+            <a:avLst/>
+          </a:prstGeom>
+        </p:spPr>
+        <p:txBody>
+          <a:bodyPr vert="horz" lIns="91440" tIns="45720" rIns="91440" bIns="45720" rtlCol="0"/>
+          <a:lstStyle>
+            <a:lvl1pPr algn="r">
+              <a:defRPr sz="1200"/>
+            </a:lvl1pPr>
+          </a:lstStyle>
+          <a:p>
+            <a:fld id="{6D7E3CE9-403E-4C33-81A7-A53D3DC51236}" type="datetimeFigureOut">
+              <a:rPr lang="en-GB" smtClean="0"/>
+              <a:t>29/05/2026</a:t>
+            </a:fld>
+            <a:endParaRPr lang="en-GB"/>
+          </a:p>
+        </p:txBody>
+      </p:sp>
+      <p:sp>
+        <p:nvSpPr>
+          <p:cNvPr id="4" name="Slide Image Placeholder 3"/>
+          <p:cNvSpPr>
+            <a:spLocks noGrp="1" noRot="1" noChangeAspect="1"/>
+          </p:cNvSpPr>
+          <p:nvPr>
+            <p:ph type="sldImg" idx="2"/>
+          </p:nvPr>
+        </p:nvSpPr>
+        <p:spPr>
+          <a:xfrm>
+            <a:off x="685800" y="1143000"/>
+            <a:ext cx="5486400" cy="3086100"/>
+          </a:xfrm>
+          <a:prstGeom prst="rect">
+            <a:avLst/>
+          </a:prstGeom>
+          <a:noFill/>
+          <a:ln w="12700">
             <a:solidFill>
-              <a:srgbClr val="7B5EA7"/>
+              <a:prstClr val="black"/>
             </a:solidFill>
-            <a:ln>
-              <a:noFill/>
-            </a:ln>
-          </c:spPr>
-          <c:cat>
-            <c:strRef>
-              <c:f>Sheet1!$A$2:$A$6</c:f>
-              <c:strCache>
-                <c:ptCount val="5"/>
-                <c:pt idx="0">
-                  <c:v>Alzheimer's Disease</c:v>
-                </c:pt>
-                <c:pt idx="1">
-                  <c:v>Major Depression</c:v>
-                </c:pt>
-                <c:pt idx="2">
-                  <c:v>Migraine</c:v>
-                </c:pt>
-                <c:pt idx="3">
-                  <c:v>Osteoporosis</c:v>
-                </c:pt>
-                <c:pt idx="4">
-                  <c:v>Systemic Lupus Erythematosus</c:v>
-                </c:pt>
-              </c:strCache>
-            </c:strRef>
-          </c:cat>
-          <c:val>
-            <c:numRef>
-              <c:f>Sheet1!$B$2:$B$6</c:f>
-              <c:numCache>
-                <c:formatCode>General</c:formatCode>
-                <c:ptCount val="5"/>
-                <c:pt idx="0">
-                  <c:v>2.0</c:v>
-                </c:pt>
-                <c:pt idx="1">
-                  <c:v>2.0</c:v>
-                </c:pt>
-                <c:pt idx="2">
-                  <c:v>3.0</c:v>
-                </c:pt>
-                <c:pt idx="3">
-                  <c:v>4.5</c:v>
-                </c:pt>
-                <c:pt idx="4">
-                  <c:v>9.0</c:v>
-                </c:pt>
-              </c:numCache>
-            </c:numRef>
-          </c:val>
-        </c:ser>
-        <c:dLbls>
-          <c:numFmt formatCode="0.0&quot;x&quot;" sourceLinked="0"/>
-          <c:txPr>
-            <a:bodyPr/>
-            <a:lstStyle/>
-            <a:p>
-              <a:pPr>
-                <a:defRPr sz="1600" b="1">
-                  <a:solidFill>
-                    <a:srgbClr val="3D2B56"/>
-                  </a:solidFill>
-                  <a:latin typeface="Calibri"/>
-                </a:defRPr>
-              </a:pPr>
-            </a:p>
-          </c:txPr>
-          <c:dLblPos val="outEnd"/>
-          <c:showLegendKey val="0"/>
-          <c:showVal val="1"/>
-          <c:showCatName val="0"/>
-          <c:showSerName val="0"/>
-          <c:showPercent val="0"/>
-          <c:showBubbleSize val="0"/>
-          <c:showLeaderLines val="1"/>
-        </c:dLbls>
-        <c:axId val="-2068027336"/>
-        <c:axId val="-2113994440"/>
-      </c:barChart>
-      <c:catAx>
-        <c:axId val="-2068027336"/>
-        <c:scaling>
-          <c:orientation val="minMax"/>
-        </c:scaling>
-        <c:delete val="0"/>
-        <c:axPos val="l"/>
-        <c:majorTickMark val="none"/>
-        <c:minorTickMark val="none"/>
-        <c:tickLblPos val="nextTo"/>
-        <c:txPr>
+          </a:ln>
+        </p:spPr>
+        <p:txBody>
+          <a:bodyPr vert="horz" lIns="91440" tIns="45720" rIns="91440" bIns="45720" rtlCol="0" anchor="ctr"/>
+          <a:lstStyle/>
+          <a:p>
+            <a:endParaRPr lang="en-GB"/>
+          </a:p>
+        </p:txBody>
+      </p:sp>
+      <p:sp>
+        <p:nvSpPr>
+          <p:cNvPr id="5" name="Notes Placeholder 4"/>
+          <p:cNvSpPr>
+            <a:spLocks noGrp="1"/>
+          </p:cNvSpPr>
+          <p:nvPr>
+            <p:ph type="body" sz="quarter" idx="3"/>
+          </p:nvPr>
+        </p:nvSpPr>
+        <p:spPr>
+          <a:xfrm>
+            <a:off x="685800" y="4400550"/>
+            <a:ext cx="5486400" cy="3600450"/>
+          </a:xfrm>
+          <a:prstGeom prst="rect">
+            <a:avLst/>
+          </a:prstGeom>
+        </p:spPr>
+        <p:txBody>
+          <a:bodyPr vert="horz" lIns="91440" tIns="45720" rIns="91440" bIns="45720" rtlCol="0"/>
+          <a:lstStyle/>
+          <a:p>
+            <a:pPr lvl="0"/>
+            <a:r>
+              <a:rPr lang="en-US"/>
+              <a:t>Click to edit Master text styles</a:t>
+            </a:r>
+          </a:p>
+          <a:p>
+            <a:pPr lvl="1"/>
+            <a:r>
+              <a:rPr lang="en-US"/>
+              <a:t>Second level</a:t>
+            </a:r>
+          </a:p>
+          <a:p>
+            <a:pPr lvl="2"/>
+            <a:r>
+              <a:rPr lang="en-US"/>
+              <a:t>Third level</a:t>
+            </a:r>
+          </a:p>
+          <a:p>
+            <a:pPr lvl="3"/>
+            <a:r>
+              <a:rPr lang="en-US"/>
+              <a:t>Fourth level</a:t>
+            </a:r>
+          </a:p>
+          <a:p>
+            <a:pPr lvl="4"/>
+            <a:r>
+              <a:rPr lang="en-US"/>
+              <a:t>Fifth level</a:t>
+            </a:r>
+            <a:endParaRPr lang="en-GB"/>
+          </a:p>
+        </p:txBody>
+      </p:sp>
+      <p:sp>
+        <p:nvSpPr>
+          <p:cNvPr id="6" name="Footer Placeholder 5"/>
+          <p:cNvSpPr>
+            <a:spLocks noGrp="1"/>
+          </p:cNvSpPr>
+          <p:nvPr>
+            <p:ph type="ftr" sz="quarter" idx="4"/>
+          </p:nvPr>
+        </p:nvSpPr>
+        <p:spPr>
+          <a:xfrm>
+            <a:off x="0" y="8685213"/>
+            <a:ext cx="2971800" cy="458787"/>
+          </a:xfrm>
+          <a:prstGeom prst="rect">
+            <a:avLst/>
+          </a:prstGeom>
+        </p:spPr>
+        <p:txBody>
+          <a:bodyPr vert="horz" lIns="91440" tIns="45720" rIns="91440" bIns="45720" rtlCol="0" anchor="b"/>
+          <a:lstStyle>
+            <a:lvl1pPr algn="l">
+              <a:defRPr sz="1200"/>
+            </a:lvl1pPr>
+          </a:lstStyle>
+          <a:p>
+            <a:endParaRPr lang="en-GB"/>
+          </a:p>
+        </p:txBody>
+      </p:sp>
+      <p:sp>
+        <p:nvSpPr>
+          <p:cNvPr id="7" name="Slide Number Placeholder 6"/>
+          <p:cNvSpPr>
+            <a:spLocks noGrp="1"/>
+          </p:cNvSpPr>
+          <p:nvPr>
+            <p:ph type="sldNum" sz="quarter" idx="5"/>
+          </p:nvPr>
+        </p:nvSpPr>
+        <p:spPr>
+          <a:xfrm>
+            <a:off x="3884613" y="8685213"/>
+            <a:ext cx="2971800" cy="458787"/>
+          </a:xfrm>
+          <a:prstGeom prst="rect">
+            <a:avLst/>
+          </a:prstGeom>
+        </p:spPr>
+        <p:txBody>
+          <a:bodyPr vert="horz" lIns="91440" tIns="45720" rIns="91440" bIns="45720" rtlCol="0" anchor="b"/>
+          <a:lstStyle>
+            <a:lvl1pPr algn="r">
+              <a:defRPr sz="1200"/>
+            </a:lvl1pPr>
+          </a:lstStyle>
+          <a:p>
+            <a:fld id="{21255439-055D-47F9-8294-741DF6860437}" type="slidenum">
+              <a:rPr lang="en-GB" smtClean="0"/>
+              <a:t>‹#›</a:t>
+            </a:fld>
+            <a:endParaRPr lang="en-GB"/>
+          </a:p>
+        </p:txBody>
+      </p:sp>
+    </p:spTree>
+    <p:extLst>
+      <p:ext uri="{BB962C8B-B14F-4D97-AF65-F5344CB8AC3E}">
+        <p14:creationId xmlns:p14="http://schemas.microsoft.com/office/powerpoint/2010/main" val="640547837"/>
+      </p:ext>
+    </p:extLst>
+  </p:cSld>
+  <p:clrMap bg1="lt1" tx1="dk1" bg2="lt2" tx2="dk2" accent1="accent1" accent2="accent2" accent3="accent3" accent4="accent4" accent5="accent5" accent6="accent6" hlink="hlink" folHlink="folHlink"/>
+  <p:notesStyle>
+    <a:lvl1pPr marL="0" algn="l" defTabSz="914400" rtl="0" eaLnBrk="1" latinLnBrk="0" hangingPunct="1">
+      <a:defRPr sz="1200" kern="1200">
+        <a:solidFill>
+          <a:schemeClr val="tx1"/>
+        </a:solidFill>
+        <a:latin typeface="+mn-lt"/>
+        <a:ea typeface="+mn-ea"/>
+        <a:cs typeface="+mn-cs"/>
+      </a:defRPr>
+    </a:lvl1pPr>
+    <a:lvl2pPr marL="457200" algn="l" defTabSz="914400" rtl="0" eaLnBrk="1" latinLnBrk="0" hangingPunct="1">
+      <a:defRPr sz="1200" kern="1200">
+        <a:solidFill>
+          <a:schemeClr val="tx1"/>
+        </a:solidFill>
+        <a:latin typeface="+mn-lt"/>
+        <a:ea typeface="+mn-ea"/>
+        <a:cs typeface="+mn-cs"/>
+      </a:defRPr>
+    </a:lvl2pPr>
+    <a:lvl3pPr marL="914400" algn="l" defTabSz="914400" rtl="0" eaLnBrk="1" latinLnBrk="0" hangingPunct="1">
+      <a:defRPr sz="1200" kern="1200">
+        <a:solidFill>
+          <a:schemeClr val="tx1"/>
+        </a:solidFill>
+        <a:latin typeface="+mn-lt"/>
+        <a:ea typeface="+mn-ea"/>
+        <a:cs typeface="+mn-cs"/>
+      </a:defRPr>
+    </a:lvl3pPr>
+    <a:lvl4pPr marL="1371600" algn="l" defTabSz="914400" rtl="0" eaLnBrk="1" latinLnBrk="0" hangingPunct="1">
+      <a:defRPr sz="1200" kern="1200">
+        <a:solidFill>
+          <a:schemeClr val="tx1"/>
+        </a:solidFill>
+        <a:latin typeface="+mn-lt"/>
+        <a:ea typeface="+mn-ea"/>
+        <a:cs typeface="+mn-cs"/>
+      </a:defRPr>
+    </a:lvl4pPr>
+    <a:lvl5pPr marL="1828800" algn="l" defTabSz="914400" rtl="0" eaLnBrk="1" latinLnBrk="0" hangingPunct="1">
+      <a:defRPr sz="1200" kern="1200">
+        <a:solidFill>
+          <a:schemeClr val="tx1"/>
+        </a:solidFill>
+        <a:latin typeface="+mn-lt"/>
+        <a:ea typeface="+mn-ea"/>
+        <a:cs typeface="+mn-cs"/>
+      </a:defRPr>
+    </a:lvl5pPr>
+    <a:lvl6pPr marL="2286000" algn="l" defTabSz="914400" rtl="0" eaLnBrk="1" latinLnBrk="0" hangingPunct="1">
+      <a:defRPr sz="1200" kern="1200">
+        <a:solidFill>
+          <a:schemeClr val="tx1"/>
+        </a:solidFill>
+        <a:latin typeface="+mn-lt"/>
+        <a:ea typeface="+mn-ea"/>
+        <a:cs typeface="+mn-cs"/>
+      </a:defRPr>
+    </a:lvl6pPr>
+    <a:lvl7pPr marL="2743200" algn="l" defTabSz="914400" rtl="0" eaLnBrk="1" latinLnBrk="0" hangingPunct="1">
+      <a:defRPr sz="1200" kern="1200">
+        <a:solidFill>
+          <a:schemeClr val="tx1"/>
+        </a:solidFill>
+        <a:latin typeface="+mn-lt"/>
+        <a:ea typeface="+mn-ea"/>
+        <a:cs typeface="+mn-cs"/>
+      </a:defRPr>
+    </a:lvl7pPr>
+    <a:lvl8pPr marL="3200400" algn="l" defTabSz="914400" rtl="0" eaLnBrk="1" latinLnBrk="0" hangingPunct="1">
+      <a:defRPr sz="1200" kern="1200">
+        <a:solidFill>
+          <a:schemeClr val="tx1"/>
+        </a:solidFill>
+        <a:latin typeface="+mn-lt"/>
+        <a:ea typeface="+mn-ea"/>
+        <a:cs typeface="+mn-cs"/>
+      </a:defRPr>
+    </a:lvl8pPr>
+    <a:lvl9pPr marL="3657600" algn="l" defTabSz="914400" rtl="0" eaLnBrk="1" latinLnBrk="0" hangingPunct="1">
+      <a:defRPr sz="1200" kern="1200">
+        <a:solidFill>
+          <a:schemeClr val="tx1"/>
+        </a:solidFill>
+        <a:latin typeface="+mn-lt"/>
+        <a:ea typeface="+mn-ea"/>
+        <a:cs typeface="+mn-cs"/>
+      </a:defRPr>
+    </a:lvl9pPr>
+  </p:notesStyle>
+</p:notesMaster>
+</file>
+
+<file path=ppt/notesSlides/notesSlide1.xml><?xml version="1.0" encoding="utf-8"?>
+<p:notes xmlns:a="http://schemas.openxmlformats.org/drawingml/2006/main" xmlns:r="http://schemas.openxmlformats.org/officeDocument/2006/relationships" xmlns:p="http://schemas.openxmlformats.org/presentationml/2006/main">
+  <p:cSld>
+    <p:spTree>
+      <p:nvGrpSpPr>
+        <p:cNvPr id="1" name=""/>
+        <p:cNvGrpSpPr/>
+        <p:nvPr/>
+      </p:nvGrpSpPr>
+      <p:grpSpPr>
+        <a:xfrm>
+          <a:off x="0" y="0"/>
+          <a:ext cx="0" cy="0"/>
+          <a:chOff x="0" y="0"/>
+          <a:chExt cx="0" cy="0"/>
+        </a:xfrm>
+      </p:grpSpPr>
+      <p:sp>
+        <p:nvSpPr>
+          <p:cNvPr id="2" name="Slide Image Placeholder 1"/>
+          <p:cNvSpPr>
+            <a:spLocks noGrp="1" noRot="1" noChangeAspect="1"/>
+          </p:cNvSpPr>
+          <p:nvPr>
+            <p:ph type="sldImg"/>
+          </p:nvPr>
+        </p:nvSpPr>
+        <p:spPr/>
+      </p:sp>
+      <p:sp>
+        <p:nvSpPr>
+          <p:cNvPr id="3" name="Notes Placeholder 2"/>
+          <p:cNvSpPr>
+            <a:spLocks noGrp="1"/>
+          </p:cNvSpPr>
+          <p:nvPr>
+            <p:ph type="body" idx="1"/>
+          </p:nvPr>
+        </p:nvSpPr>
+        <p:spPr/>
+        <p:txBody>
           <a:bodyPr/>
           <a:lstStyle/>
           <a:p>
-            <a:pPr>
-              <a:defRPr sz="1400">
-                <a:solidFill>
-                  <a:srgbClr val="2C2C2C"/>
-                </a:solidFill>
-                <a:latin typeface="Calibri"/>
-              </a:defRPr>
-            </a:pPr>
-          </a:p>
-        </c:txPr>
-        <c:crossAx val="-2113994440"/>
-        <c:crosses val="autoZero"/>
-        <c:auto val="1"/>
-        <c:lblAlgn val="ctr"/>
-        <c:lblOffset val="100"/>
-        <c:noMultiLvlLbl val="0"/>
-      </c:catAx>
-      <c:valAx>
-        <c:axId val="-2113994440"/>
-        <c:scaling>
-          <c:max val="10.0"/>
-          <c:min val="0.0"/>
-        </c:scaling>
-        <c:delete/>
-        <c:axPos val="b"/>
-        <c:majorTickMark val="none"/>
-        <c:minorTickMark val="none"/>
-        <c:tickLblPos val="nextTo"/>
-        <c:txPr>
+            <a:endParaRPr lang="en-GB" dirty="0"/>
+          </a:p>
+        </p:txBody>
+      </p:sp>
+      <p:sp>
+        <p:nvSpPr>
+          <p:cNvPr id="4" name="Slide Number Placeholder 3"/>
+          <p:cNvSpPr>
+            <a:spLocks noGrp="1"/>
+          </p:cNvSpPr>
+          <p:nvPr>
+            <p:ph type="sldNum" sz="quarter" idx="10"/>
+          </p:nvPr>
+        </p:nvSpPr>
+        <p:spPr/>
+        <p:txBody>
           <a:bodyPr/>
           <a:lstStyle/>
           <a:p>
-            <a:pPr>
-              <a:defRPr sz="100"/>
-            </a:pPr>
-          </a:p>
-        </c:txPr>
-        <c:crossAx val="-2068027336"/>
-        <c:crosses val="autoZero"/>
-      </c:valAx>
-    </c:plotArea>
-    <c:dispBlanksAs val="gap"/>
-  </c:chart>
-  <c:txPr>
-    <a:bodyPr/>
-    <a:lstStyle/>
-    <a:p>
-      <a:pPr>
-        <a:defRPr sz="1800"/>
-      </a:pPr>
-      <a:endParaRPr lang="en-US"/>
-    </a:p>
-  </c:txPr>
-  <c:externalData r:id="rId1">
-    <c:autoUpdate val="0"/>
-  </c:externalData>
-</c:chartSpace>
+            <a:fld id="{21255439-055D-47F9-8294-741DF6860437}" type="slidenum">
+              <a:rPr lang="en-GB" smtClean="0"/>
+              <a:t>1</a:t>
+            </a:fld>
+            <a:endParaRPr lang="en-GB"/>
+          </a:p>
+        </p:txBody>
+      </p:sp>
+    </p:spTree>
+    <p:extLst>
+      <p:ext uri="{BB962C8B-B14F-4D97-AF65-F5344CB8AC3E}">
+        <p14:creationId xmlns:p14="http://schemas.microsoft.com/office/powerpoint/2010/main" val="1284601396"/>
+      </p:ext>
+    </p:extLst>
+  </p:cSld>
+  <p:clrMapOvr>
+    <a:masterClrMapping/>
+  </p:clrMapOvr>
+</p:notes>
 </file>
 
 <file path=ppt/slideLayouts/slideLayout1.xml><?xml version="1.0" encoding="utf-8"?>
@@ -334,10 +606,9 @@
           <a:lstStyle/>
           <a:p>
             <a:r>
-              <a:rPr lang="en-US" smtClean="0"/>
+              <a:rPr lang="en-US"/>
               <a:t>Click to edit Master title style</a:t>
             </a:r>
-            <a:endParaRPr lang="en-US"/>
           </a:p>
         </p:txBody>
       </p:sp>
@@ -453,10 +724,9 @@
           </a:lstStyle>
           <a:p>
             <a:r>
-              <a:rPr lang="en-US" smtClean="0"/>
+              <a:rPr lang="en-US"/>
               <a:t>Click to edit Master subtitle style</a:t>
             </a:r>
-            <a:endParaRPr lang="en-US"/>
           </a:p>
         </p:txBody>
       </p:sp>
@@ -477,7 +747,7 @@
           <a:p>
             <a:fld id="{5BCAD085-E8A6-8845-BD4E-CB4CCA059FC4}" type="datetimeFigureOut">
               <a:rPr lang="en-US" smtClean="0"/>
-              <a:t>1/27/13</a:t>
+              <a:t>5/29/2026</a:t>
             </a:fld>
             <a:endParaRPr lang="en-US"/>
           </a:p>
@@ -571,10 +841,9 @@
           <a:lstStyle/>
           <a:p>
             <a:r>
-              <a:rPr lang="en-US" smtClean="0"/>
+              <a:rPr lang="en-US"/>
               <a:t>Click to edit Master title style</a:t>
             </a:r>
-            <a:endParaRPr lang="en-US"/>
           </a:p>
         </p:txBody>
       </p:sp>
@@ -595,38 +864,37 @@
           <a:p>
             <a:pPr lvl="0"/>
             <a:r>
-              <a:rPr lang="en-US" smtClean="0"/>
+              <a:rPr lang="en-US"/>
               <a:t>Click to edit Master text styles</a:t>
             </a:r>
           </a:p>
           <a:p>
             <a:pPr lvl="1"/>
             <a:r>
-              <a:rPr lang="en-US" smtClean="0"/>
+              <a:rPr lang="en-US"/>
               <a:t>Second level</a:t>
             </a:r>
           </a:p>
           <a:p>
             <a:pPr lvl="2"/>
             <a:r>
-              <a:rPr lang="en-US" smtClean="0"/>
+              <a:rPr lang="en-US"/>
               <a:t>Third level</a:t>
             </a:r>
           </a:p>
           <a:p>
             <a:pPr lvl="3"/>
             <a:r>
-              <a:rPr lang="en-US" smtClean="0"/>
+              <a:rPr lang="en-US"/>
               <a:t>Fourth level</a:t>
             </a:r>
           </a:p>
           <a:p>
             <a:pPr lvl="4"/>
             <a:r>
-              <a:rPr lang="en-US" smtClean="0"/>
+              <a:rPr lang="en-US"/>
               <a:t>Fifth level</a:t>
             </a:r>
-            <a:endParaRPr lang="en-US"/>
           </a:p>
         </p:txBody>
       </p:sp>
@@ -647,7 +915,7 @@
           <a:p>
             <a:fld id="{5BCAD085-E8A6-8845-BD4E-CB4CCA059FC4}" type="datetimeFigureOut">
               <a:rPr lang="en-US" smtClean="0"/>
-              <a:t>1/27/13</a:t>
+              <a:t>5/29/2026</a:t>
             </a:fld>
             <a:endParaRPr lang="en-US"/>
           </a:p>
@@ -746,10 +1014,9 @@
           <a:lstStyle/>
           <a:p>
             <a:r>
-              <a:rPr lang="en-US" smtClean="0"/>
+              <a:rPr lang="en-US"/>
               <a:t>Click to edit Master title style</a:t>
             </a:r>
-            <a:endParaRPr lang="en-US"/>
           </a:p>
         </p:txBody>
       </p:sp>
@@ -775,38 +1042,37 @@
           <a:p>
             <a:pPr lvl="0"/>
             <a:r>
-              <a:rPr lang="en-US" smtClean="0"/>
+              <a:rPr lang="en-US"/>
               <a:t>Click to edit Master text styles</a:t>
             </a:r>
           </a:p>
           <a:p>
             <a:pPr lvl="1"/>
             <a:r>
-              <a:rPr lang="en-US" smtClean="0"/>
+              <a:rPr lang="en-US"/>
               <a:t>Second level</a:t>
             </a:r>
           </a:p>
           <a:p>
             <a:pPr lvl="2"/>
             <a:r>
-              <a:rPr lang="en-US" smtClean="0"/>
+              <a:rPr lang="en-US"/>
               <a:t>Third level</a:t>
             </a:r>
           </a:p>
           <a:p>
             <a:pPr lvl="3"/>
             <a:r>
-              <a:rPr lang="en-US" smtClean="0"/>
+              <a:rPr lang="en-US"/>
               <a:t>Fourth level</a:t>
             </a:r>
           </a:p>
           <a:p>
             <a:pPr lvl="4"/>
             <a:r>
-              <a:rPr lang="en-US" smtClean="0"/>
+              <a:rPr lang="en-US"/>
               <a:t>Fifth level</a:t>
             </a:r>
-            <a:endParaRPr lang="en-US"/>
           </a:p>
         </p:txBody>
       </p:sp>
@@ -827,7 +1093,7 @@
           <a:p>
             <a:fld id="{5BCAD085-E8A6-8845-BD4E-CB4CCA059FC4}" type="datetimeFigureOut">
               <a:rPr lang="en-US" smtClean="0"/>
-              <a:t>1/27/13</a:t>
+              <a:t>5/29/2026</a:t>
             </a:fld>
             <a:endParaRPr lang="en-US"/>
           </a:p>
@@ -921,10 +1187,9 @@
           <a:lstStyle/>
           <a:p>
             <a:r>
-              <a:rPr lang="en-US" smtClean="0"/>
+              <a:rPr lang="en-US"/>
               <a:t>Click to edit Master title style</a:t>
             </a:r>
-            <a:endParaRPr lang="en-US"/>
           </a:p>
         </p:txBody>
       </p:sp>
@@ -945,38 +1210,37 @@
           <a:p>
             <a:pPr lvl="0"/>
             <a:r>
-              <a:rPr lang="en-US" smtClean="0"/>
+              <a:rPr lang="en-US"/>
               <a:t>Click to edit Master text styles</a:t>
             </a:r>
           </a:p>
           <a:p>
             <a:pPr lvl="1"/>
             <a:r>
-              <a:rPr lang="en-US" smtClean="0"/>
+              <a:rPr lang="en-US"/>
               <a:t>Second level</a:t>
             </a:r>
           </a:p>
           <a:p>
             <a:pPr lvl="2"/>
             <a:r>
-              <a:rPr lang="en-US" smtClean="0"/>
+              <a:rPr lang="en-US"/>
               <a:t>Third level</a:t>
             </a:r>
           </a:p>
           <a:p>
             <a:pPr lvl="3"/>
             <a:r>
-              <a:rPr lang="en-US" smtClean="0"/>
+              <a:rPr lang="en-US"/>
               <a:t>Fourth level</a:t>
             </a:r>
           </a:p>
           <a:p>
             <a:pPr lvl="4"/>
             <a:r>
-              <a:rPr lang="en-US" smtClean="0"/>
+              <a:rPr lang="en-US"/>
               <a:t>Fifth level</a:t>
             </a:r>
-            <a:endParaRPr lang="en-US"/>
           </a:p>
         </p:txBody>
       </p:sp>
@@ -997,7 +1261,7 @@
           <a:p>
             <a:fld id="{5BCAD085-E8A6-8845-BD4E-CB4CCA059FC4}" type="datetimeFigureOut">
               <a:rPr lang="en-US" smtClean="0"/>
-              <a:t>1/27/13</a:t>
+              <a:t>5/29/2026</a:t>
             </a:fld>
             <a:endParaRPr lang="en-US"/>
           </a:p>
@@ -1100,10 +1364,9 @@
           </a:lstStyle>
           <a:p>
             <a:r>
-              <a:rPr lang="en-US" smtClean="0"/>
+              <a:rPr lang="en-US"/>
               <a:t>Click to edit Master title style</a:t>
             </a:r>
-            <a:endParaRPr lang="en-US"/>
           </a:p>
         </p:txBody>
       </p:sp>
@@ -1220,7 +1483,7 @@
           <a:p>
             <a:pPr lvl="0"/>
             <a:r>
-              <a:rPr lang="en-US" smtClean="0"/>
+              <a:rPr lang="en-US"/>
               <a:t>Click to edit Master text styles</a:t>
             </a:r>
           </a:p>
@@ -1243,7 +1506,7 @@
           <a:p>
             <a:fld id="{5BCAD085-E8A6-8845-BD4E-CB4CCA059FC4}" type="datetimeFigureOut">
               <a:rPr lang="en-US" smtClean="0"/>
-              <a:t>1/27/13</a:t>
+              <a:t>5/29/2026</a:t>
             </a:fld>
             <a:endParaRPr lang="en-US"/>
           </a:p>
@@ -1337,10 +1600,9 @@
           <a:lstStyle/>
           <a:p>
             <a:r>
-              <a:rPr lang="en-US" smtClean="0"/>
+              <a:rPr lang="en-US"/>
               <a:t>Click to edit Master title style</a:t>
             </a:r>
-            <a:endParaRPr lang="en-US"/>
           </a:p>
         </p:txBody>
       </p:sp>
@@ -1394,38 +1656,37 @@
           <a:p>
             <a:pPr lvl="0"/>
             <a:r>
-              <a:rPr lang="en-US" smtClean="0"/>
+              <a:rPr lang="en-US"/>
               <a:t>Click to edit Master text styles</a:t>
             </a:r>
           </a:p>
           <a:p>
             <a:pPr lvl="1"/>
             <a:r>
-              <a:rPr lang="en-US" smtClean="0"/>
+              <a:rPr lang="en-US"/>
               <a:t>Second level</a:t>
             </a:r>
           </a:p>
           <a:p>
             <a:pPr lvl="2"/>
             <a:r>
-              <a:rPr lang="en-US" smtClean="0"/>
+              <a:rPr lang="en-US"/>
               <a:t>Third level</a:t>
             </a:r>
           </a:p>
           <a:p>
             <a:pPr lvl="3"/>
             <a:r>
-              <a:rPr lang="en-US" smtClean="0"/>
+              <a:rPr lang="en-US"/>
               <a:t>Fourth level</a:t>
             </a:r>
           </a:p>
           <a:p>
             <a:pPr lvl="4"/>
             <a:r>
-              <a:rPr lang="en-US" smtClean="0"/>
+              <a:rPr lang="en-US"/>
               <a:t>Fifth level</a:t>
             </a:r>
-            <a:endParaRPr lang="en-US"/>
           </a:p>
         </p:txBody>
       </p:sp>
@@ -1479,38 +1740,37 @@
           <a:p>
             <a:pPr lvl="0"/>
             <a:r>
-              <a:rPr lang="en-US" smtClean="0"/>
+              <a:rPr lang="en-US"/>
               <a:t>Click to edit Master text styles</a:t>
             </a:r>
           </a:p>
           <a:p>
             <a:pPr lvl="1"/>
             <a:r>
-              <a:rPr lang="en-US" smtClean="0"/>
+              <a:rPr lang="en-US"/>
               <a:t>Second level</a:t>
             </a:r>
           </a:p>
           <a:p>
             <a:pPr lvl="2"/>
             <a:r>
-              <a:rPr lang="en-US" smtClean="0"/>
+              <a:rPr lang="en-US"/>
               <a:t>Third level</a:t>
             </a:r>
           </a:p>
           <a:p>
             <a:pPr lvl="3"/>
             <a:r>
-              <a:rPr lang="en-US" smtClean="0"/>
+              <a:rPr lang="en-US"/>
               <a:t>Fourth level</a:t>
             </a:r>
           </a:p>
           <a:p>
             <a:pPr lvl="4"/>
             <a:r>
-              <a:rPr lang="en-US" smtClean="0"/>
+              <a:rPr lang="en-US"/>
               <a:t>Fifth level</a:t>
             </a:r>
-            <a:endParaRPr lang="en-US"/>
           </a:p>
         </p:txBody>
       </p:sp>
@@ -1531,7 +1791,7 @@
           <a:p>
             <a:fld id="{5BCAD085-E8A6-8845-BD4E-CB4CCA059FC4}" type="datetimeFigureOut">
               <a:rPr lang="en-US" smtClean="0"/>
-              <a:t>1/27/13</a:t>
+              <a:t>5/29/2026</a:t>
             </a:fld>
             <a:endParaRPr lang="en-US"/>
           </a:p>
@@ -1629,10 +1889,9 @@
           </a:lstStyle>
           <a:p>
             <a:r>
-              <a:rPr lang="en-US" smtClean="0"/>
+              <a:rPr lang="en-US"/>
               <a:t>Click to edit Master title style</a:t>
             </a:r>
-            <a:endParaRPr lang="en-US"/>
           </a:p>
         </p:txBody>
       </p:sp>
@@ -1695,7 +1954,7 @@
           <a:p>
             <a:pPr lvl="0"/>
             <a:r>
-              <a:rPr lang="en-US" smtClean="0"/>
+              <a:rPr lang="en-US"/>
               <a:t>Click to edit Master text styles</a:t>
             </a:r>
           </a:p>
@@ -1751,38 +2010,37 @@
           <a:p>
             <a:pPr lvl="0"/>
             <a:r>
-              <a:rPr lang="en-US" smtClean="0"/>
+              <a:rPr lang="en-US"/>
               <a:t>Click to edit Master text styles</a:t>
             </a:r>
           </a:p>
           <a:p>
             <a:pPr lvl="1"/>
             <a:r>
-              <a:rPr lang="en-US" smtClean="0"/>
+              <a:rPr lang="en-US"/>
               <a:t>Second level</a:t>
             </a:r>
           </a:p>
           <a:p>
             <a:pPr lvl="2"/>
             <a:r>
-              <a:rPr lang="en-US" smtClean="0"/>
+              <a:rPr lang="en-US"/>
               <a:t>Third level</a:t>
             </a:r>
           </a:p>
           <a:p>
             <a:pPr lvl="3"/>
             <a:r>
-              <a:rPr lang="en-US" smtClean="0"/>
+              <a:rPr lang="en-US"/>
               <a:t>Fourth level</a:t>
             </a:r>
           </a:p>
           <a:p>
             <a:pPr lvl="4"/>
             <a:r>
-              <a:rPr lang="en-US" smtClean="0"/>
+              <a:rPr lang="en-US"/>
               <a:t>Fifth level</a:t>
             </a:r>
-            <a:endParaRPr lang="en-US"/>
           </a:p>
         </p:txBody>
       </p:sp>
@@ -1845,7 +2103,7 @@
           <a:p>
             <a:pPr lvl="0"/>
             <a:r>
-              <a:rPr lang="en-US" smtClean="0"/>
+              <a:rPr lang="en-US"/>
               <a:t>Click to edit Master text styles</a:t>
             </a:r>
           </a:p>
@@ -1901,38 +2159,37 @@
           <a:p>
             <a:pPr lvl="0"/>
             <a:r>
-              <a:rPr lang="en-US" smtClean="0"/>
+              <a:rPr lang="en-US"/>
               <a:t>Click to edit Master text styles</a:t>
             </a:r>
           </a:p>
           <a:p>
             <a:pPr lvl="1"/>
             <a:r>
-              <a:rPr lang="en-US" smtClean="0"/>
+              <a:rPr lang="en-US"/>
               <a:t>Second level</a:t>
             </a:r>
           </a:p>
           <a:p>
             <a:pPr lvl="2"/>
             <a:r>
-              <a:rPr lang="en-US" smtClean="0"/>
+              <a:rPr lang="en-US"/>
               <a:t>Third level</a:t>
             </a:r>
           </a:p>
           <a:p>
             <a:pPr lvl="3"/>
             <a:r>
-              <a:rPr lang="en-US" smtClean="0"/>
+              <a:rPr lang="en-US"/>
               <a:t>Fourth level</a:t>
             </a:r>
           </a:p>
           <a:p>
             <a:pPr lvl="4"/>
             <a:r>
-              <a:rPr lang="en-US" smtClean="0"/>
+              <a:rPr lang="en-US"/>
               <a:t>Fifth level</a:t>
             </a:r>
-            <a:endParaRPr lang="en-US"/>
           </a:p>
         </p:txBody>
       </p:sp>
@@ -1953,7 +2210,7 @@
           <a:p>
             <a:fld id="{5BCAD085-E8A6-8845-BD4E-CB4CCA059FC4}" type="datetimeFigureOut">
               <a:rPr lang="en-US" smtClean="0"/>
-              <a:t>1/27/13</a:t>
+              <a:t>5/29/2026</a:t>
             </a:fld>
             <a:endParaRPr lang="en-US"/>
           </a:p>
@@ -2047,10 +2304,9 @@
           <a:lstStyle/>
           <a:p>
             <a:r>
-              <a:rPr lang="en-US" smtClean="0"/>
+              <a:rPr lang="en-US"/>
               <a:t>Click to edit Master title style</a:t>
             </a:r>
-            <a:endParaRPr lang="en-US"/>
           </a:p>
         </p:txBody>
       </p:sp>
@@ -2071,7 +2327,7 @@
           <a:p>
             <a:fld id="{5BCAD085-E8A6-8845-BD4E-CB4CCA059FC4}" type="datetimeFigureOut">
               <a:rPr lang="en-US" smtClean="0"/>
-              <a:t>1/27/13</a:t>
+              <a:t>5/29/2026</a:t>
             </a:fld>
             <a:endParaRPr lang="en-US"/>
           </a:p>
@@ -2166,7 +2422,7 @@
           <a:p>
             <a:fld id="{5BCAD085-E8A6-8845-BD4E-CB4CCA059FC4}" type="datetimeFigureOut">
               <a:rPr lang="en-US" smtClean="0"/>
-              <a:t>1/27/13</a:t>
+              <a:t>5/29/2026</a:t>
             </a:fld>
             <a:endParaRPr lang="en-US"/>
           </a:p>
@@ -2269,10 +2525,9 @@
           </a:lstStyle>
           <a:p>
             <a:r>
-              <a:rPr lang="en-US" smtClean="0"/>
+              <a:rPr lang="en-US"/>
               <a:t>Click to edit Master title style</a:t>
             </a:r>
-            <a:endParaRPr lang="en-US"/>
           </a:p>
         </p:txBody>
       </p:sp>
@@ -2326,38 +2581,37 @@
           <a:p>
             <a:pPr lvl="0"/>
             <a:r>
-              <a:rPr lang="en-US" smtClean="0"/>
+              <a:rPr lang="en-US"/>
               <a:t>Click to edit Master text styles</a:t>
             </a:r>
           </a:p>
           <a:p>
             <a:pPr lvl="1"/>
             <a:r>
-              <a:rPr lang="en-US" smtClean="0"/>
+              <a:rPr lang="en-US"/>
               <a:t>Second level</a:t>
             </a:r>
           </a:p>
           <a:p>
             <a:pPr lvl="2"/>
             <a:r>
-              <a:rPr lang="en-US" smtClean="0"/>
+              <a:rPr lang="en-US"/>
               <a:t>Third level</a:t>
             </a:r>
           </a:p>
           <a:p>
             <a:pPr lvl="3"/>
             <a:r>
-              <a:rPr lang="en-US" smtClean="0"/>
+              <a:rPr lang="en-US"/>
               <a:t>Fourth level</a:t>
             </a:r>
           </a:p>
           <a:p>
             <a:pPr lvl="4"/>
             <a:r>
-              <a:rPr lang="en-US" smtClean="0"/>
+              <a:rPr lang="en-US"/>
               <a:t>Fifth level</a:t>
             </a:r>
-            <a:endParaRPr lang="en-US"/>
           </a:p>
         </p:txBody>
       </p:sp>
@@ -2420,7 +2674,7 @@
           <a:p>
             <a:pPr lvl="0"/>
             <a:r>
-              <a:rPr lang="en-US" smtClean="0"/>
+              <a:rPr lang="en-US"/>
               <a:t>Click to edit Master text styles</a:t>
             </a:r>
           </a:p>
@@ -2443,7 +2697,7 @@
           <a:p>
             <a:fld id="{5BCAD085-E8A6-8845-BD4E-CB4CCA059FC4}" type="datetimeFigureOut">
               <a:rPr lang="en-US" smtClean="0"/>
-              <a:t>1/27/13</a:t>
+              <a:t>5/29/2026</a:t>
             </a:fld>
             <a:endParaRPr lang="en-US"/>
           </a:p>
@@ -2546,10 +2800,9 @@
           </a:lstStyle>
           <a:p>
             <a:r>
-              <a:rPr lang="en-US" smtClean="0"/>
+              <a:rPr lang="en-US"/>
               <a:t>Click to edit Master title style</a:t>
             </a:r>
-            <a:endParaRPr lang="en-US"/>
           </a:p>
         </p:txBody>
       </p:sp>
@@ -2673,7 +2926,7 @@
           <a:p>
             <a:pPr lvl="0"/>
             <a:r>
-              <a:rPr lang="en-US" smtClean="0"/>
+              <a:rPr lang="en-US"/>
               <a:t>Click to edit Master text styles</a:t>
             </a:r>
           </a:p>
@@ -2696,7 +2949,7 @@
           <a:p>
             <a:fld id="{5BCAD085-E8A6-8845-BD4E-CB4CCA059FC4}" type="datetimeFigureOut">
               <a:rPr lang="en-US" smtClean="0"/>
-              <a:t>1/27/13</a:t>
+              <a:t>5/29/2026</a:t>
             </a:fld>
             <a:endParaRPr lang="en-US"/>
           </a:p>
@@ -2805,10 +3058,9 @@
           <a:lstStyle/>
           <a:p>
             <a:r>
-              <a:rPr lang="en-US" smtClean="0"/>
+              <a:rPr lang="en-US"/>
               <a:t>Click to edit Master title style</a:t>
             </a:r>
-            <a:endParaRPr lang="en-US"/>
           </a:p>
         </p:txBody>
       </p:sp>
@@ -2839,38 +3091,37 @@
           <a:p>
             <a:pPr lvl="0"/>
             <a:r>
-              <a:rPr lang="en-US" smtClean="0"/>
+              <a:rPr lang="en-US"/>
               <a:t>Click to edit Master text styles</a:t>
             </a:r>
           </a:p>
           <a:p>
             <a:pPr lvl="1"/>
             <a:r>
-              <a:rPr lang="en-US" smtClean="0"/>
+              <a:rPr lang="en-US"/>
               <a:t>Second level</a:t>
             </a:r>
           </a:p>
           <a:p>
             <a:pPr lvl="2"/>
             <a:r>
-              <a:rPr lang="en-US" smtClean="0"/>
+              <a:rPr lang="en-US"/>
               <a:t>Third level</a:t>
             </a:r>
           </a:p>
           <a:p>
             <a:pPr lvl="3"/>
             <a:r>
-              <a:rPr lang="en-US" smtClean="0"/>
+              <a:rPr lang="en-US"/>
               <a:t>Fourth level</a:t>
             </a:r>
           </a:p>
           <a:p>
             <a:pPr lvl="4"/>
             <a:r>
-              <a:rPr lang="en-US" smtClean="0"/>
+              <a:rPr lang="en-US"/>
               <a:t>Fifth level</a:t>
             </a:r>
-            <a:endParaRPr lang="en-US"/>
           </a:p>
         </p:txBody>
       </p:sp>
@@ -2909,7 +3160,7 @@
           <a:p>
             <a:fld id="{5BCAD085-E8A6-8845-BD4E-CB4CCA059FC4}" type="datetimeFigureOut">
               <a:rPr lang="en-US" smtClean="0"/>
-              <a:t>1/27/13</a:t>
+              <a:t>5/29/2026</a:t>
             </a:fld>
             <a:endParaRPr lang="en-US"/>
           </a:p>
@@ -3268,7 +3519,7 @@
 </file>
 
 <file path=ppt/slides/slide1.xml><?xml version="1.0" encoding="utf-8"?>
-<p:sld xmlns:a="http://schemas.openxmlformats.org/drawingml/2006/main" xmlns:p="http://schemas.openxmlformats.org/presentationml/2006/main" xmlns:r="http://schemas.openxmlformats.org/officeDocument/2006/relationships">
+<p:sld xmlns:a="http://schemas.openxmlformats.org/drawingml/2006/main" xmlns:r="http://schemas.openxmlformats.org/officeDocument/2006/relationships" xmlns:p="http://schemas.openxmlformats.org/presentationml/2006/main">
   <p:cSld>
     <p:bg>
       <p:bgPr>
@@ -3284,7 +3535,14 @@
         <p:cNvGrpSpPr/>
         <p:nvPr/>
       </p:nvGrpSpPr>
-      <p:grpSpPr/>
+      <p:grpSpPr>
+        <a:xfrm>
+          <a:off x="0" y="0"/>
+          <a:ext cx="0" cy="0"/>
+          <a:chOff x="0" y="0"/>
+          <a:chExt cx="0" cy="0"/>
+        </a:xfrm>
+      </p:grpSpPr>
       <p:sp>
         <p:nvSpPr>
           <p:cNvPr id="2" name="TextBox 1"/>
@@ -3293,8 +3551,8 @@
         </p:nvSpPr>
         <p:spPr>
           <a:xfrm>
-            <a:off x="822960" y="1463040"/>
-            <a:ext cx="10515600" cy="1828800"/>
+            <a:off x="822960" y="3318734"/>
+            <a:ext cx="10515600" cy="1477328"/>
           </a:xfrm>
           <a:prstGeom prst="rect">
             <a:avLst/>
@@ -3302,16 +3560,19 @@
           <a:noFill/>
         </p:spPr>
         <p:txBody>
-          <a:bodyPr wrap="square" lIns="0" rIns="0" tIns="0" bIns="0" anchor="t">
+          <a:bodyPr wrap="square" lIns="0" tIns="0" rIns="0" bIns="0" anchor="t">
             <a:spAutoFit/>
           </a:bodyPr>
           <a:lstStyle/>
           <a:p>
             <a:pPr algn="l"/>
             <a:r>
-              <a:rPr sz="4400" b="1">
-                <a:solidFill>
-                  <a:srgbClr val="FFFFFF"/>
+              <a:rPr sz="4800" b="1" dirty="0">
+                <a:solidFill>
+                  <a:schemeClr val="accent6">
+                    <a:lumMod val="20000"/>
+                    <a:lumOff val="80000"/>
+                  </a:schemeClr>
                 </a:solidFill>
                 <a:latin typeface="Calibri"/>
               </a:rPr>
@@ -3323,14 +3584,14 @@
       </p:sp>
       <p:sp>
         <p:nvSpPr>
-          <p:cNvPr id="3" name="TextBox 2"/>
+          <p:cNvPr id="4" name="TextBox 3"/>
           <p:cNvSpPr txBox="1"/>
           <p:nvPr/>
         </p:nvSpPr>
         <p:spPr>
           <a:xfrm>
-            <a:off x="822960" y="3931920"/>
-            <a:ext cx="10515600" cy="2194560"/>
+            <a:off x="822960" y="5443370"/>
+            <a:ext cx="10515600" cy="369332"/>
           </a:xfrm>
           <a:prstGeom prst="rect">
             <a:avLst/>
@@ -3338,56 +3599,27 @@
           <a:noFill/>
         </p:spPr>
         <p:txBody>
-          <a:bodyPr wrap="square" lIns="0" rIns="0" tIns="0" bIns="0" anchor="t">
+          <a:bodyPr wrap="square" lIns="0" tIns="0" rIns="0" bIns="0" anchor="t">
             <a:spAutoFit/>
           </a:bodyPr>
           <a:lstStyle/>
           <a:p>
             <a:pPr algn="l"/>
             <a:r>
-              <a:rPr sz="2000" b="0">
-                <a:solidFill>
-                  <a:srgbClr val="FFFFFF"/>
+              <a:rPr lang="en-GB" sz="2400" b="0" dirty="0">
+                <a:solidFill>
+                  <a:srgbClr val="E8A838"/>
                 </a:solidFill>
                 <a:latin typeface="Calibri"/>
               </a:rPr>
-              <a:t>The same female-skewed health burden that shows up in Zambia's diabetes numbers runs through five of the most disabling diseases of modern life — and the world still designs medicine, research and screening as if it didn't.</a:t>
-            </a:r>
-          </a:p>
-        </p:txBody>
-      </p:sp>
-      <p:sp>
-        <p:nvSpPr>
-          <p:cNvPr id="4" name="TextBox 3"/>
-          <p:cNvSpPr txBox="1"/>
-          <p:nvPr/>
-        </p:nvSpPr>
-        <p:spPr>
-          <a:xfrm>
-            <a:off x="822960" y="6263640"/>
-            <a:ext cx="10515600" cy="365760"/>
-          </a:xfrm>
-          <a:prstGeom prst="rect">
-            <a:avLst/>
-          </a:prstGeom>
-          <a:noFill/>
-        </p:spPr>
-        <p:txBody>
-          <a:bodyPr wrap="square" lIns="0" rIns="0" tIns="0" bIns="0" anchor="t">
-            <a:spAutoFit/>
-          </a:bodyPr>
-          <a:lstStyle/>
-          <a:p>
-            <a:pPr algn="l"/>
-            <a:r>
-              <a:rPr sz="1100" b="0">
-                <a:solidFill>
-                  <a:srgbClr val="E8A838"/>
-                </a:solidFill>
-                <a:latin typeface="Calibri"/>
-              </a:rPr>
-              <a:t>Female disease prevalence  ·  Five conditions, one pattern</a:t>
-            </a:r>
+              <a:t>Answer by Joanna Imasiku</a:t>
+            </a:r>
+            <a:endParaRPr sz="2400" b="0" dirty="0">
+              <a:solidFill>
+                <a:srgbClr val="E8A838"/>
+              </a:solidFill>
+              <a:latin typeface="Calibri"/>
+            </a:endParaRPr>
           </a:p>
         </p:txBody>
       </p:sp>
@@ -3399,8 +3631,8 @@
 </p:sld>
 </file>
 
-<file path=ppt/slides/slide10.xml><?xml version="1.0" encoding="utf-8"?>
-<p:sld xmlns:a="http://schemas.openxmlformats.org/drawingml/2006/main" xmlns:p="http://schemas.openxmlformats.org/presentationml/2006/main" xmlns:r="http://schemas.openxmlformats.org/officeDocument/2006/relationships">
+<file path=ppt/slides/slide2.xml><?xml version="1.0" encoding="utf-8"?>
+<p:sld xmlns:a="http://schemas.openxmlformats.org/drawingml/2006/main" xmlns:r="http://schemas.openxmlformats.org/officeDocument/2006/relationships" xmlns:p="http://schemas.openxmlformats.org/presentationml/2006/main">
   <p:cSld>
     <p:bg>
       <p:bgPr>
@@ -3416,17 +3648,70 @@
         <p:cNvGrpSpPr/>
         <p:nvPr/>
       </p:nvGrpSpPr>
-      <p:grpSpPr/>
-      <p:sp>
-        <p:nvSpPr>
-          <p:cNvPr id="2" name="TextBox 1"/>
+      <p:grpSpPr>
+        <a:xfrm>
+          <a:off x="0" y="0"/>
+          <a:ext cx="0" cy="0"/>
+          <a:chOff x="0" y="0"/>
+          <a:chExt cx="0" cy="0"/>
+        </a:xfrm>
+      </p:grpSpPr>
+      <p:sp>
+        <p:nvSpPr>
+          <p:cNvPr id="11" name="Rounded Rectangle 10"/>
+          <p:cNvSpPr/>
+          <p:nvPr/>
+        </p:nvSpPr>
+        <p:spPr>
+          <a:xfrm>
+            <a:off x="477365" y="3546376"/>
+            <a:ext cx="11073656" cy="1990122"/>
+          </a:xfrm>
+          <a:prstGeom prst="roundRect">
+            <a:avLst>
+              <a:gd name="adj" fmla="val 6000"/>
+            </a:avLst>
+          </a:prstGeom>
+          <a:solidFill>
+            <a:srgbClr val="F3EEF8"/>
+          </a:solidFill>
+          <a:ln>
+            <a:noFill/>
+          </a:ln>
+        </p:spPr>
+        <p:style>
+          <a:lnRef idx="1">
+            <a:schemeClr val="accent1"/>
+          </a:lnRef>
+          <a:fillRef idx="3">
+            <a:schemeClr val="accent1"/>
+          </a:fillRef>
+          <a:effectRef idx="2">
+            <a:schemeClr val="accent1"/>
+          </a:effectRef>
+          <a:fontRef idx="minor">
+            <a:schemeClr val="lt1"/>
+          </a:fontRef>
+        </p:style>
+        <p:txBody>
+          <a:bodyPr rtlCol="0" anchor="ctr"/>
+          <a:lstStyle/>
+          <a:p>
+            <a:pPr algn="ctr"/>
+            <a:endParaRPr/>
+          </a:p>
+        </p:txBody>
+      </p:sp>
+      <p:sp>
+        <p:nvSpPr>
+          <p:cNvPr id="3" name="TextBox 2"/>
           <p:cNvSpPr txBox="1"/>
           <p:nvPr/>
         </p:nvSpPr>
         <p:spPr>
           <a:xfrm>
-            <a:off x="822960" y="457200"/>
-            <a:ext cx="10515600" cy="548640"/>
+            <a:off x="457198" y="627695"/>
+            <a:ext cx="6715461" cy="492443"/>
           </a:xfrm>
           <a:prstGeom prst="rect">
             <a:avLst/>
@@ -3434,34 +3719,32 @@
           <a:noFill/>
         </p:spPr>
         <p:txBody>
-          <a:bodyPr wrap="square" lIns="0" rIns="0" tIns="0" bIns="0" anchor="t">
+          <a:bodyPr wrap="square" lIns="0" tIns="0" rIns="0" bIns="0" anchor="t">
             <a:spAutoFit/>
           </a:bodyPr>
           <a:lstStyle/>
           <a:p>
-            <a:pPr algn="l"/>
-            <a:r>
-              <a:rPr sz="2600" b="1">
+            <a:r>
+              <a:rPr lang="en-GB" sz="3200" b="1" dirty="0">
                 <a:solidFill>
                   <a:srgbClr val="3D2B56"/>
                 </a:solidFill>
-                <a:latin typeface="Calibri"/>
-              </a:rPr>
-              <a:t>Sources</a:t>
-            </a:r>
-          </a:p>
-        </p:txBody>
-      </p:sp>
-      <p:sp>
-        <p:nvSpPr>
-          <p:cNvPr id="3" name="TextBox 2"/>
+              </a:rPr>
+              <a:t>five conditions, one pattern</a:t>
+            </a:r>
+          </a:p>
+        </p:txBody>
+      </p:sp>
+      <p:sp>
+        <p:nvSpPr>
+          <p:cNvPr id="4" name="TextBox 3"/>
           <p:cNvSpPr txBox="1"/>
           <p:nvPr/>
         </p:nvSpPr>
         <p:spPr>
           <a:xfrm>
-            <a:off x="822960" y="1188720"/>
-            <a:ext cx="10515600" cy="5029200"/>
+            <a:off x="457196" y="1256039"/>
+            <a:ext cx="11093825" cy="2154436"/>
           </a:xfrm>
           <a:prstGeom prst="rect">
             <a:avLst/>
@@ -3469,172 +3752,132 @@
           <a:noFill/>
         </p:spPr>
         <p:txBody>
-          <a:bodyPr wrap="square" lIns="0" rIns="0">
+          <a:bodyPr wrap="square" lIns="0" tIns="0" rIns="0" bIns="0" anchor="t">
             <a:spAutoFit/>
           </a:bodyPr>
           <a:lstStyle/>
           <a:p>
-            <a:pPr algn="l">
-              <a:spcAft>
-                <a:spcPts val="800"/>
-              </a:spcAft>
+            <a:pPr marL="457200" indent="-457200">
+              <a:buFont typeface="Arial" panose="020B0604020202020204" pitchFamily="34" charset="0"/>
+              <a:buChar char="•"/>
             </a:pPr>
             <a:r>
-              <a:rPr sz="1200" b="1">
-                <a:solidFill>
-                  <a:srgbClr val="3D2B56"/>
+              <a:rPr lang="en-GB" sz="2800" dirty="0">
+                <a:solidFill>
+                  <a:srgbClr val="6B6B6B"/>
                 </a:solidFill>
                 <a:latin typeface="Calibri"/>
               </a:rPr>
-              <a:t>[1] Systemic Lupus Erythematosus (Lupus) — </a:t>
-            </a:r>
-            <a:r>
-              <a:rPr sz="1100">
-                <a:solidFill>
-                  <a:srgbClr val="2C2C2C"/>
+              <a:t>Systemic Lupus Erythematosus</a:t>
+            </a:r>
+          </a:p>
+          <a:p>
+            <a:pPr marL="457200" indent="-457200">
+              <a:buFont typeface="Arial" panose="020B0604020202020204" pitchFamily="34" charset="0"/>
+              <a:buChar char="•"/>
+            </a:pPr>
+            <a:r>
+              <a:rPr lang="en-GB" sz="2800" dirty="0">
+                <a:solidFill>
+                  <a:srgbClr val="6B6B6B"/>
                 </a:solidFill>
                 <a:latin typeface="Calibri"/>
               </a:rPr>
-              <a:t>Sex- and gender-related differences in systemic lupus erythematosus: a scoping review (PMC, 2024).  https://pmc.ncbi.nlm.nih.gov/articles/PMC12204902/</a:t>
-            </a:r>
-          </a:p>
-          <a:p>
-            <a:pPr algn="l">
-              <a:spcAft>
-                <a:spcPts val="800"/>
-              </a:spcAft>
+              <a:t>Osteoporosis</a:t>
+            </a:r>
+          </a:p>
+          <a:p>
+            <a:pPr marL="457200" indent="-457200">
+              <a:buFont typeface="Arial" panose="020B0604020202020204" pitchFamily="34" charset="0"/>
+              <a:buChar char="•"/>
             </a:pPr>
             <a:r>
-              <a:rPr sz="1200" b="1">
-                <a:solidFill>
-                  <a:srgbClr val="3D2B56"/>
+              <a:rPr lang="en-GB" sz="2800" dirty="0">
+                <a:solidFill>
+                  <a:srgbClr val="6B6B6B"/>
                 </a:solidFill>
                 <a:latin typeface="Calibri"/>
               </a:rPr>
-              <a:t>[2] Osteoporosis — </a:t>
-            </a:r>
-            <a:r>
-              <a:rPr sz="1100">
-                <a:solidFill>
-                  <a:srgbClr val="2C2C2C"/>
+              <a:t>Migraine</a:t>
+            </a:r>
+          </a:p>
+          <a:p>
+            <a:pPr marL="457200" indent="-457200">
+              <a:buFont typeface="Arial" panose="020B0604020202020204" pitchFamily="34" charset="0"/>
+              <a:buChar char="•"/>
+            </a:pPr>
+            <a:r>
+              <a:rPr lang="en-GB" sz="2800" dirty="0">
+                <a:solidFill>
+                  <a:srgbClr val="6B6B6B"/>
                 </a:solidFill>
                 <a:latin typeface="Calibri"/>
               </a:rPr>
-              <a:t>Sarafrazi N, Wambogo EA, Shepherd JA. Osteoporosis or Low Bone Mass in Older Adults, United States, 2017-2018. CDC NCHS Data Brief No. 405, 2021.  https://www.cdc.gov/nchs/products/databriefs/db405.htm</a:t>
-            </a:r>
-          </a:p>
-          <a:p>
-            <a:pPr algn="l">
-              <a:spcAft>
-                <a:spcPts val="800"/>
-              </a:spcAft>
+              <a:t>Major Depression</a:t>
+            </a:r>
+          </a:p>
+          <a:p>
+            <a:pPr marL="457200" indent="-457200">
+              <a:buFont typeface="Arial" panose="020B0604020202020204" pitchFamily="34" charset="0"/>
+              <a:buChar char="•"/>
             </a:pPr>
             <a:r>
-              <a:rPr sz="1200" b="1">
-                <a:solidFill>
-                  <a:srgbClr val="3D2B56"/>
+              <a:rPr lang="en-GB" sz="2800" dirty="0">
+                <a:solidFill>
+                  <a:srgbClr val="6B6B6B"/>
                 </a:solidFill>
                 <a:latin typeface="Calibri"/>
               </a:rPr>
-              <a:t>[3] Migraine — </a:t>
-            </a:r>
-            <a:r>
-              <a:rPr sz="1100">
-                <a:solidFill>
-                  <a:srgbClr val="2C2C2C"/>
-                </a:solidFill>
-                <a:latin typeface="Calibri"/>
-              </a:rPr>
-              <a:t>Buse DC et al. Sex differences in the prevalence, symptoms, and associated features of migraine — AMPP Study. PubMed, 2013.  https://pubmed.ncbi.nlm.nih.gov/23808666/</a:t>
-            </a:r>
-          </a:p>
-          <a:p>
-            <a:pPr algn="l">
-              <a:spcAft>
-                <a:spcPts val="800"/>
-              </a:spcAft>
-            </a:pPr>
-            <a:r>
-              <a:rPr sz="1200" b="1">
-                <a:solidFill>
-                  <a:srgbClr val="3D2B56"/>
-                </a:solidFill>
-                <a:latin typeface="Calibri"/>
-              </a:rPr>
-              <a:t>[4] Alzheimer's Disease — </a:t>
-            </a:r>
-            <a:r>
-              <a:rPr sz="1100">
-                <a:solidFill>
-                  <a:srgbClr val="2C2C2C"/>
-                </a:solidFill>
-                <a:latin typeface="Calibri"/>
-              </a:rPr>
-              <a:t>Alzheimer's disease as a women's health challenge (PMC, 2024).  https://pmc.ncbi.nlm.nih.gov/articles/PMC11106001/</a:t>
-            </a:r>
-          </a:p>
-          <a:p>
-            <a:pPr algn="l">
-              <a:spcAft>
-                <a:spcPts val="800"/>
-              </a:spcAft>
-            </a:pPr>
-            <a:r>
-              <a:rPr sz="1200" b="1">
-                <a:solidFill>
-                  <a:srgbClr val="3D2B56"/>
-                </a:solidFill>
-                <a:latin typeface="Calibri"/>
-              </a:rPr>
-              <a:t>[5] Major Depression — </a:t>
-            </a:r>
-            <a:r>
-              <a:rPr sz="1100">
-                <a:solidFill>
-                  <a:srgbClr val="2C2C2C"/>
-                </a:solidFill>
-                <a:latin typeface="Calibri"/>
-              </a:rPr>
-              <a:t>Albert PR. Why is depression more prevalent in women? Journal of Psychiatry &amp; Neuroscience. PMC, 2015.  https://pmc.ncbi.nlm.nih.gov/articles/PMC4478054/</a:t>
-            </a:r>
-          </a:p>
-          <a:p>
-            <a:pPr algn="l">
-              <a:spcAft>
-                <a:spcPts val="800"/>
-              </a:spcAft>
-            </a:pPr>
-            <a:r>
-              <a:rPr sz="1200" b="1">
-                <a:solidFill>
-                  <a:srgbClr val="3D2B56"/>
-                </a:solidFill>
-                <a:latin typeface="Calibri"/>
-              </a:rPr>
-              <a:t>[H] Hook — Zambia STEPS 2017 — </a:t>
-            </a:r>
-            <a:r>
-              <a:rPr sz="1100">
-                <a:solidFill>
-                  <a:srgbClr val="2C2C2C"/>
-                </a:solidFill>
-                <a:latin typeface="Calibri"/>
-              </a:rPr>
-              <a:t>Pengpid S, Peltzer K. Prevalence and correlates of multiple non-communicable disease risk factors among adults in Zambia: results of the first national STEPS survey in 2017. PMC, 2021.  https://www.ncbi.nlm.nih.gov/pmc/articles/PMC7864270/</a:t>
-            </a:r>
-          </a:p>
-        </p:txBody>
-      </p:sp>
-      <p:sp>
-        <p:nvSpPr>
-          <p:cNvPr id="4" name="TextBox 3"/>
+              <a:t>Alzheimer's disease</a:t>
+            </a:r>
+          </a:p>
+        </p:txBody>
+      </p:sp>
+      <p:cxnSp>
+        <p:nvCxnSpPr>
+          <p:cNvPr id="9" name="Connector 8"/>
+          <p:cNvCxnSpPr/>
+          <p:nvPr/>
+        </p:nvCxnSpPr>
+        <p:spPr>
+          <a:xfrm>
+            <a:off x="457198" y="6039630"/>
+            <a:ext cx="11093824" cy="16136"/>
+          </a:xfrm>
+          <a:prstGeom prst="line">
+            <a:avLst/>
+          </a:prstGeom>
+          <a:ln w="6350">
+            <a:solidFill>
+              <a:srgbClr val="E0D8F0"/>
+            </a:solidFill>
+          </a:ln>
+        </p:spPr>
+        <p:style>
+          <a:lnRef idx="2">
+            <a:schemeClr val="accent1"/>
+          </a:lnRef>
+          <a:fillRef idx="0">
+            <a:schemeClr val="accent1"/>
+          </a:fillRef>
+          <a:effectRef idx="1">
+            <a:schemeClr val="accent1"/>
+          </a:effectRef>
+          <a:fontRef idx="minor">
+            <a:schemeClr val="tx1"/>
+          </a:fontRef>
+        </p:style>
+      </p:cxnSp>
+      <p:sp>
+        <p:nvSpPr>
+          <p:cNvPr id="2" name="TextBox 1"/>
           <p:cNvSpPr txBox="1"/>
           <p:nvPr/>
         </p:nvSpPr>
         <p:spPr>
           <a:xfrm>
-            <a:off x="457200" y="6446520"/>
-            <a:ext cx="10424160" cy="320040"/>
+            <a:off x="477366" y="3802773"/>
+            <a:ext cx="11073656" cy="1477328"/>
           </a:xfrm>
           <a:prstGeom prst="rect">
             <a:avLst/>
@@ -3642,21 +3885,22 @@
           <a:noFill/>
         </p:spPr>
         <p:txBody>
-          <a:bodyPr wrap="square" lIns="0" rIns="0" tIns="0" bIns="0" anchor="t">
+          <a:bodyPr wrap="square" rtlCol="0">
             <a:spAutoFit/>
           </a:bodyPr>
           <a:lstStyle/>
           <a:p>
-            <a:pPr algn="l"/>
-            <a:r>
-              <a:rPr sz="900" b="0">
-                <a:solidFill>
-                  <a:srgbClr val="888888"/>
-                </a:solidFill>
-                <a:latin typeface="Calibri"/>
-              </a:rPr>
-              <a:t>All sources accessed via PubMed Central, CDC NCHS, and peer-reviewed journals.</a:t>
-            </a:r>
+            <a:r>
+              <a:rPr lang="en-GB" sz="2400" dirty="0">
+                <a:solidFill>
+                  <a:srgbClr val="6B6B6B"/>
+                </a:solidFill>
+              </a:rPr>
+              <a:t>The same female-skewed health burden that shows up in Zambia's diabetes numbers runs through five of the most disabling diseases of modern life and the world still designs medicine, research and screening as if it didn't.</a:t>
+            </a:r>
+          </a:p>
+          <a:p>
+            <a:endParaRPr lang="en-GB" dirty="0"/>
           </a:p>
         </p:txBody>
       </p:sp>
@@ -3668,8 +3912,8 @@
 </p:sld>
 </file>
 
-<file path=ppt/slides/slide2.xml><?xml version="1.0" encoding="utf-8"?>
-<p:sld xmlns:a="http://schemas.openxmlformats.org/drawingml/2006/main" xmlns:p="http://schemas.openxmlformats.org/presentationml/2006/main" xmlns:r="http://schemas.openxmlformats.org/officeDocument/2006/relationships">
+<file path=ppt/slides/slide3.xml><?xml version="1.0" encoding="utf-8"?>
+<p:sld xmlns:a="http://schemas.openxmlformats.org/drawingml/2006/main" xmlns:r="http://schemas.openxmlformats.org/officeDocument/2006/relationships" xmlns:p="http://schemas.openxmlformats.org/presentationml/2006/main">
   <p:cSld>
     <p:bg>
       <p:bgPr>
@@ -3685,17 +3929,78 @@
         <p:cNvGrpSpPr/>
         <p:nvPr/>
       </p:nvGrpSpPr>
-      <p:grpSpPr/>
-      <p:sp>
-        <p:nvSpPr>
-          <p:cNvPr id="2" name="TextBox 1"/>
+      <p:grpSpPr>
+        <a:xfrm>
+          <a:off x="0" y="0"/>
+          <a:ext cx="0" cy="0"/>
+          <a:chOff x="0" y="0"/>
+          <a:chExt cx="0" cy="0"/>
+        </a:xfrm>
+      </p:grpSpPr>
+      <p:sp>
+        <p:nvSpPr>
+          <p:cNvPr id="2" name="Rounded Rectangle 1"/>
+          <p:cNvSpPr/>
+          <p:nvPr/>
+        </p:nvSpPr>
+        <p:spPr>
+          <a:xfrm>
+            <a:off x="457199" y="381898"/>
+            <a:ext cx="11214847" cy="365760"/>
+          </a:xfrm>
+          <a:prstGeom prst="roundRect">
+            <a:avLst>
+              <a:gd name="adj" fmla="val 50000"/>
+            </a:avLst>
+          </a:prstGeom>
+          <a:solidFill>
+            <a:srgbClr val="EEEDFE"/>
+          </a:solidFill>
+          <a:ln>
+            <a:noFill/>
+          </a:ln>
+        </p:spPr>
+        <p:style>
+          <a:lnRef idx="1">
+            <a:schemeClr val="accent1"/>
+          </a:lnRef>
+          <a:fillRef idx="3">
+            <a:schemeClr val="accent1"/>
+          </a:fillRef>
+          <a:effectRef idx="2">
+            <a:schemeClr val="accent1"/>
+          </a:effectRef>
+          <a:fontRef idx="minor">
+            <a:schemeClr val="lt1"/>
+          </a:fontRef>
+        </p:style>
+        <p:txBody>
+          <a:bodyPr lIns="0" tIns="0" rIns="0" bIns="0" rtlCol="0" anchor="ctr"/>
+          <a:lstStyle/>
+          <a:p>
+            <a:pPr algn="ctr"/>
+            <a:r>
+              <a:rPr sz="1600" b="1" dirty="0">
+                <a:solidFill>
+                  <a:srgbClr val="534AB7"/>
+                </a:solidFill>
+                <a:latin typeface="Calibri"/>
+              </a:rPr>
+              <a:t>AUTOIMMUNE</a:t>
+            </a:r>
+          </a:p>
+        </p:txBody>
+      </p:sp>
+      <p:sp>
+        <p:nvSpPr>
+          <p:cNvPr id="3" name="TextBox 2"/>
           <p:cNvSpPr txBox="1"/>
           <p:nvPr/>
         </p:nvSpPr>
         <p:spPr>
           <a:xfrm>
-            <a:off x="822960" y="1051560"/>
-            <a:ext cx="10515600" cy="502920"/>
+            <a:off x="457198" y="1290599"/>
+            <a:ext cx="6715461" cy="492443"/>
           </a:xfrm>
           <a:prstGeom prst="rect">
             <a:avLst/>
@@ -3703,34 +4008,33 @@
           <a:noFill/>
         </p:spPr>
         <p:txBody>
-          <a:bodyPr wrap="square" lIns="0" rIns="0" tIns="0" bIns="0" anchor="t">
+          <a:bodyPr wrap="square" lIns="0" tIns="0" rIns="0" bIns="0" anchor="t">
             <a:spAutoFit/>
           </a:bodyPr>
           <a:lstStyle/>
           <a:p>
-            <a:pPr algn="l"/>
-            <a:r>
-              <a:rPr sz="2200" b="1">
+            <a:r>
+              <a:rPr sz="3200" b="1" dirty="0">
                 <a:solidFill>
                   <a:srgbClr val="3D2B56"/>
                 </a:solidFill>
                 <a:latin typeface="Calibri"/>
               </a:rPr>
-              <a:t>Zambia's 2017 STEPS survey</a:t>
-            </a:r>
-          </a:p>
-        </p:txBody>
-      </p:sp>
-      <p:sp>
-        <p:nvSpPr>
-          <p:cNvPr id="3" name="TextBox 2"/>
+              <a:t>Systemic Lupus Erythematosus (Lupus)</a:t>
+            </a:r>
+          </a:p>
+        </p:txBody>
+      </p:sp>
+      <p:sp>
+        <p:nvSpPr>
+          <p:cNvPr id="4" name="TextBox 3"/>
           <p:cNvSpPr txBox="1"/>
           <p:nvPr/>
         </p:nvSpPr>
         <p:spPr>
           <a:xfrm>
-            <a:off x="822960" y="2057400"/>
-            <a:ext cx="10515600" cy="2011680"/>
+            <a:off x="457200" y="1993820"/>
+            <a:ext cx="6715462" cy="1292662"/>
           </a:xfrm>
           <a:prstGeom prst="rect">
             <a:avLst/>
@@ -3738,34 +4042,80 @@
           <a:noFill/>
         </p:spPr>
         <p:txBody>
-          <a:bodyPr wrap="square" lIns="0" rIns="0" tIns="0" bIns="0" anchor="t">
+          <a:bodyPr wrap="square" lIns="0" tIns="0" rIns="0" bIns="0" anchor="t">
             <a:spAutoFit/>
           </a:bodyPr>
           <a:lstStyle/>
           <a:p>
             <a:pPr algn="l"/>
             <a:r>
-              <a:rPr sz="11000" b="1">
-                <a:solidFill>
-                  <a:srgbClr val="E8A838"/>
+              <a:rPr sz="2800" b="0" dirty="0">
+                <a:solidFill>
+                  <a:srgbClr val="6B6B6B"/>
                 </a:solidFill>
                 <a:latin typeface="Calibri"/>
               </a:rPr>
-              <a:t>24%</a:t>
-            </a:r>
-          </a:p>
-        </p:txBody>
-      </p:sp>
-      <p:sp>
-        <p:nvSpPr>
-          <p:cNvPr id="4" name="TextBox 3"/>
+              <a:t>A chronic autoimmune disease where the body's immune system attacks its own tissues — skin, joints, kidneys, heart and brain.</a:t>
+            </a:r>
+          </a:p>
+        </p:txBody>
+      </p:sp>
+      <p:sp>
+        <p:nvSpPr>
+          <p:cNvPr id="5" name="Rounded Rectangle 4"/>
+          <p:cNvSpPr/>
+          <p:nvPr/>
+        </p:nvSpPr>
+        <p:spPr>
+          <a:xfrm>
+            <a:off x="7697096" y="1410617"/>
+            <a:ext cx="3974950" cy="2389206"/>
+          </a:xfrm>
+          <a:prstGeom prst="roundRect">
+            <a:avLst>
+              <a:gd name="adj" fmla="val 6000"/>
+            </a:avLst>
+          </a:prstGeom>
+          <a:solidFill>
+            <a:srgbClr val="FAEEDA"/>
+          </a:solidFill>
+          <a:ln>
+            <a:noFill/>
+          </a:ln>
+        </p:spPr>
+        <p:style>
+          <a:lnRef idx="1">
+            <a:schemeClr val="accent1"/>
+          </a:lnRef>
+          <a:fillRef idx="3">
+            <a:schemeClr val="accent1"/>
+          </a:fillRef>
+          <a:effectRef idx="2">
+            <a:schemeClr val="accent1"/>
+          </a:effectRef>
+          <a:fontRef idx="minor">
+            <a:schemeClr val="lt1"/>
+          </a:fontRef>
+        </p:style>
+        <p:txBody>
+          <a:bodyPr rtlCol="0" anchor="ctr"/>
+          <a:lstStyle/>
+          <a:p>
+            <a:pPr algn="ctr"/>
+            <a:endParaRPr/>
+          </a:p>
+        </p:txBody>
+      </p:sp>
+      <p:sp>
+        <p:nvSpPr>
+          <p:cNvPr id="6" name="TextBox 5"/>
           <p:cNvSpPr txBox="1"/>
           <p:nvPr/>
         </p:nvSpPr>
         <p:spPr>
           <a:xfrm>
-            <a:off x="822960" y="4297680"/>
-            <a:ext cx="10515600" cy="1645920"/>
+            <a:off x="8221531" y="1596376"/>
+            <a:ext cx="2926080" cy="276999"/>
           </a:xfrm>
           <a:prstGeom prst="rect">
             <a:avLst/>
@@ -3773,34 +4123,34 @@
           <a:noFill/>
         </p:spPr>
         <p:txBody>
-          <a:bodyPr wrap="square" lIns="0" rIns="0" tIns="0" bIns="0" anchor="t">
+          <a:bodyPr wrap="square" lIns="0" tIns="0" rIns="0" bIns="0" anchor="t">
             <a:spAutoFit/>
           </a:bodyPr>
           <a:lstStyle/>
           <a:p>
-            <a:pPr algn="l"/>
-            <a:r>
-              <a:rPr sz="2200" b="0">
-                <a:solidFill>
-                  <a:srgbClr val="2C2C2C"/>
+            <a:pPr algn="ctr"/>
+            <a:r>
+              <a:rPr b="1" dirty="0">
+                <a:solidFill>
+                  <a:srgbClr val="633806"/>
                 </a:solidFill>
                 <a:latin typeface="Calibri"/>
               </a:rPr>
-              <a:t>more women than men carried multiple non-communicable disease risk factors — and female diabetes prevalence ran 3.0% vs 2.1% in men.</a:t>
-            </a:r>
-          </a:p>
-        </p:txBody>
-      </p:sp>
-      <p:sp>
-        <p:nvSpPr>
-          <p:cNvPr id="5" name="TextBox 4"/>
+              <a:t>FEMALE-TO-MALE RATIO</a:t>
+            </a:r>
+          </a:p>
+        </p:txBody>
+      </p:sp>
+      <p:sp>
+        <p:nvSpPr>
+          <p:cNvPr id="7" name="TextBox 6"/>
           <p:cNvSpPr txBox="1"/>
           <p:nvPr/>
         </p:nvSpPr>
         <p:spPr>
           <a:xfrm>
-            <a:off x="457200" y="6446520"/>
-            <a:ext cx="10424160" cy="320040"/>
+            <a:off x="8221531" y="1966254"/>
+            <a:ext cx="2926080" cy="1077218"/>
           </a:xfrm>
           <a:prstGeom prst="rect">
             <a:avLst/>
@@ -3808,25 +4158,135 @@
           <a:noFill/>
         </p:spPr>
         <p:txBody>
-          <a:bodyPr wrap="square" lIns="0" rIns="0" tIns="0" bIns="0" anchor="t">
+          <a:bodyPr wrap="square" lIns="0" tIns="0" rIns="0" bIns="0" anchor="t">
             <a:spAutoFit/>
           </a:bodyPr>
           <a:lstStyle/>
           <a:p>
+            <a:pPr algn="ctr"/>
+            <a:r>
+              <a:rPr sz="7000" b="1" dirty="0">
+                <a:solidFill>
+                  <a:srgbClr val="BA7517"/>
+                </a:solidFill>
+                <a:latin typeface="Calibri"/>
+              </a:rPr>
+              <a:t>9:1</a:t>
+            </a:r>
+          </a:p>
+        </p:txBody>
+      </p:sp>
+      <p:sp>
+        <p:nvSpPr>
+          <p:cNvPr id="8" name="TextBox 7"/>
+          <p:cNvSpPr txBox="1"/>
+          <p:nvPr/>
+        </p:nvSpPr>
+        <p:spPr>
+          <a:xfrm>
+            <a:off x="8221531" y="3136352"/>
+            <a:ext cx="2926080" cy="553998"/>
+          </a:xfrm>
+          <a:prstGeom prst="rect">
+            <a:avLst/>
+          </a:prstGeom>
+          <a:noFill/>
+        </p:spPr>
+        <p:txBody>
+          <a:bodyPr wrap="square" lIns="0" tIns="0" rIns="0" bIns="0" anchor="t">
+            <a:spAutoFit/>
+          </a:bodyPr>
+          <a:lstStyle/>
+          <a:p>
+            <a:pPr algn="ctr"/>
+            <a:r>
+              <a:rPr b="0" dirty="0">
+                <a:solidFill>
+                  <a:srgbClr val="854F0B"/>
+                </a:solidFill>
+                <a:latin typeface="Calibri"/>
+              </a:rPr>
+              <a:t>Nine out of every ten people living with lupus are women.</a:t>
+            </a:r>
+          </a:p>
+        </p:txBody>
+      </p:sp>
+      <p:cxnSp>
+        <p:nvCxnSpPr>
+          <p:cNvPr id="9" name="Connector 8"/>
+          <p:cNvCxnSpPr/>
+          <p:nvPr/>
+        </p:nvCxnSpPr>
+        <p:spPr>
+          <a:xfrm>
+            <a:off x="457198" y="6039630"/>
+            <a:ext cx="11093824" cy="16136"/>
+          </a:xfrm>
+          <a:prstGeom prst="line">
+            <a:avLst/>
+          </a:prstGeom>
+          <a:ln w="6350">
+            <a:solidFill>
+              <a:srgbClr val="E0D8F0"/>
+            </a:solidFill>
+          </a:ln>
+        </p:spPr>
+        <p:style>
+          <a:lnRef idx="2">
+            <a:schemeClr val="accent1"/>
+          </a:lnRef>
+          <a:fillRef idx="0">
+            <a:schemeClr val="accent1"/>
+          </a:fillRef>
+          <a:effectRef idx="1">
+            <a:schemeClr val="accent1"/>
+          </a:effectRef>
+          <a:fontRef idx="minor">
+            <a:schemeClr val="tx1"/>
+          </a:fontRef>
+        </p:style>
+      </p:cxnSp>
+      <p:sp>
+        <p:nvSpPr>
+          <p:cNvPr id="10" name="TextBox 9"/>
+          <p:cNvSpPr txBox="1"/>
+          <p:nvPr/>
+        </p:nvSpPr>
+        <p:spPr>
+          <a:xfrm>
+            <a:off x="457200" y="6492240"/>
+            <a:ext cx="8229600" cy="365760"/>
+          </a:xfrm>
+          <a:prstGeom prst="rect">
+            <a:avLst/>
+          </a:prstGeom>
+          <a:noFill/>
+        </p:spPr>
+        <p:txBody>
+          <a:bodyPr wrap="square" lIns="0" tIns="0" rIns="0" bIns="0">
+            <a:spAutoFit/>
+          </a:bodyPr>
+          <a:lstStyle/>
+          <a:p>
             <a:pPr algn="l"/>
             <a:r>
-              <a:rPr sz="900" b="0">
-                <a:solidFill>
-                  <a:srgbClr val="888888"/>
+              <a:rPr sz="900" dirty="0">
+                <a:solidFill>
+                  <a:srgbClr val="AAAAAA"/>
                 </a:solidFill>
                 <a:latin typeface="Calibri"/>
               </a:rPr>
-              <a:t>Source: Pengpid S, Peltzer K. Prevalence and correlates of multiple non-communicable disease risk factors among adults in Zambia: results of the first national STEPS survey in 2017. PMC, 2021  ·  https://www.ncbi.nlm.nih.gov/pmc/articles/PMC7864270/</a:t>
+              <a:t>[1] Sex- and gender-related differences in systemic lupus erythematosus: a scoping review (PMC, 2024) · https://pmc.ncbi.nlm.nih.gov/articles/PMC12204902/</a:t>
             </a:r>
           </a:p>
         </p:txBody>
       </p:sp>
     </p:spTree>
+    <p:extLst>
+      <p:ext uri="{BB962C8B-B14F-4D97-AF65-F5344CB8AC3E}">
+        <p14:creationId xmlns:p14="http://schemas.microsoft.com/office/powerpoint/2010/main" val="1209601890"/>
+      </p:ext>
+    </p:extLst>
   </p:cSld>
   <p:clrMapOvr>
     <a:masterClrMapping/>
@@ -3834,8 +4294,8 @@
 </p:sld>
 </file>
 
-<file path=ppt/slides/slide3.xml><?xml version="1.0" encoding="utf-8"?>
-<p:sld xmlns:a="http://schemas.openxmlformats.org/drawingml/2006/main" xmlns:p="http://schemas.openxmlformats.org/presentationml/2006/main" xmlns:r="http://schemas.openxmlformats.org/officeDocument/2006/relationships">
+<file path=ppt/slides/slide4.xml><?xml version="1.0" encoding="utf-8"?>
+<p:sld xmlns:a="http://schemas.openxmlformats.org/drawingml/2006/main" xmlns:r="http://schemas.openxmlformats.org/officeDocument/2006/relationships" xmlns:p="http://schemas.openxmlformats.org/presentationml/2006/main">
   <p:cSld>
     <p:bg>
       <p:bgPr>
@@ -3851,17 +4311,77 @@
         <p:cNvGrpSpPr/>
         <p:nvPr/>
       </p:nvGrpSpPr>
-      <p:grpSpPr/>
-      <p:sp>
-        <p:nvSpPr>
-          <p:cNvPr id="2" name="TextBox 1"/>
+      <p:grpSpPr>
+        <a:xfrm>
+          <a:off x="0" y="0"/>
+          <a:ext cx="0" cy="0"/>
+          <a:chOff x="0" y="0"/>
+          <a:chExt cx="0" cy="0"/>
+        </a:xfrm>
+      </p:grpSpPr>
+      <p:sp>
+        <p:nvSpPr>
+          <p:cNvPr id="2" name="Rounded Rectangle 1"/>
+          <p:cNvSpPr/>
+          <p:nvPr/>
+        </p:nvSpPr>
+        <p:spPr>
+          <a:xfrm>
+            <a:off x="396686" y="381898"/>
+            <a:ext cx="11214847" cy="365760"/>
+          </a:xfrm>
+          <a:prstGeom prst="roundRect">
+            <a:avLst>
+              <a:gd name="adj" fmla="val 50000"/>
+            </a:avLst>
+          </a:prstGeom>
+          <a:solidFill>
+            <a:srgbClr val="EEEDFE"/>
+          </a:solidFill>
+          <a:ln>
+            <a:noFill/>
+          </a:ln>
+        </p:spPr>
+        <p:style>
+          <a:lnRef idx="1">
+            <a:schemeClr val="accent1"/>
+          </a:lnRef>
+          <a:fillRef idx="3">
+            <a:schemeClr val="accent1"/>
+          </a:fillRef>
+          <a:effectRef idx="2">
+            <a:schemeClr val="accent1"/>
+          </a:effectRef>
+          <a:fontRef idx="minor">
+            <a:schemeClr val="lt1"/>
+          </a:fontRef>
+        </p:style>
+        <p:txBody>
+          <a:bodyPr lIns="0" tIns="0" rIns="0" bIns="0" rtlCol="0" anchor="ctr"/>
+          <a:lstStyle/>
+          <a:p>
+            <a:pPr algn="ctr"/>
+            <a:r>
+              <a:rPr lang="en-GB" sz="1600" b="1" dirty="0">
+                <a:solidFill>
+                  <a:srgbClr val="534AB7"/>
+                </a:solidFill>
+              </a:rPr>
+              <a:t>MUSCULOSKELETAL</a:t>
+            </a:r>
+          </a:p>
+        </p:txBody>
+      </p:sp>
+      <p:sp>
+        <p:nvSpPr>
+          <p:cNvPr id="3" name="TextBox 2"/>
           <p:cNvSpPr txBox="1"/>
           <p:nvPr/>
         </p:nvSpPr>
         <p:spPr>
           <a:xfrm>
-            <a:off x="822960" y="1051560"/>
-            <a:ext cx="10515600" cy="822960"/>
+            <a:off x="457199" y="1253057"/>
+            <a:ext cx="6715461" cy="492443"/>
           </a:xfrm>
           <a:prstGeom prst="rect">
             <a:avLst/>
@@ -3869,42 +4389,22 @@
           <a:noFill/>
         </p:spPr>
         <p:txBody>
-          <a:bodyPr wrap="square" lIns="0" rIns="0" tIns="0" bIns="0" anchor="t">
+          <a:bodyPr wrap="square" lIns="0" tIns="0" rIns="0" bIns="0" anchor="t">
             <a:spAutoFit/>
           </a:bodyPr>
           <a:lstStyle/>
           <a:p>
-            <a:pPr algn="l"/>
-            <a:r>
-              <a:rPr sz="2800" b="1">
+            <a:r>
+              <a:rPr lang="en-GB" sz="3200" b="1" dirty="0">
                 <a:solidFill>
                   <a:srgbClr val="3D2B56"/>
                 </a:solidFill>
-                <a:latin typeface="Calibri"/>
-              </a:rPr>
-              <a:t>Female-to-male prevalence ratio, five conditions</a:t>
-            </a:r>
-          </a:p>
-        </p:txBody>
-      </p:sp>
-      <p:graphicFrame>
-        <p:nvGraphicFramePr>
-          <p:cNvPr id="3" name="Chart 2"/>
-          <p:cNvGraphicFramePr>
-            <a:graphicFrameLocks noGrp="1"/>
-          </p:cNvGraphicFramePr>
-          <p:nvPr/>
-        </p:nvGraphicFramePr>
-        <p:xfrm>
-          <a:off x="822960" y="2194560"/>
-          <a:ext cx="10515600" cy="4023360"/>
-        </p:xfrm>
-        <a:graphic>
-          <a:graphicData uri="http://schemas.openxmlformats.org/drawingml/2006/chart">
-            <c:chart xmlns:c="http://schemas.openxmlformats.org/drawingml/2006/chart" r:id="rId2"/>
-          </a:graphicData>
-        </a:graphic>
-      </p:graphicFrame>
+              </a:rPr>
+              <a:t>Osteoporosis</a:t>
+            </a:r>
+          </a:p>
+        </p:txBody>
+      </p:sp>
       <p:sp>
         <p:nvSpPr>
           <p:cNvPr id="4" name="TextBox 3"/>
@@ -3913,8 +4413,8 @@
         </p:nvSpPr>
         <p:spPr>
           <a:xfrm>
-            <a:off x="457200" y="6446520"/>
-            <a:ext cx="10424160" cy="320040"/>
+            <a:off x="457198" y="1985497"/>
+            <a:ext cx="6715462" cy="1292662"/>
           </a:xfrm>
           <a:prstGeom prst="rect">
             <a:avLst/>
@@ -3922,25 +4422,286 @@
           <a:noFill/>
         </p:spPr>
         <p:txBody>
-          <a:bodyPr wrap="square" lIns="0" rIns="0" tIns="0" bIns="0" anchor="t">
+          <a:bodyPr wrap="square" lIns="0" tIns="0" rIns="0" bIns="0" anchor="t">
             <a:spAutoFit/>
           </a:bodyPr>
           <a:lstStyle/>
           <a:p>
-            <a:pPr algn="l"/>
-            <a:r>
-              <a:rPr sz="900" b="0">
-                <a:solidFill>
-                  <a:srgbClr val="888888"/>
+            <a:r>
+              <a:rPr lang="en-GB" sz="2800" dirty="0">
+                <a:solidFill>
+                  <a:srgbClr val="6B6B6B"/>
+                </a:solidFill>
+              </a:rPr>
+              <a:t>A silent bone-thinning disease that makes fractures much more likely after age 50 often discovered only after a broken hip or wrist</a:t>
+            </a:r>
+            <a:r>
+              <a:rPr sz="2800" b="0" dirty="0">
+                <a:solidFill>
+                  <a:srgbClr val="6B6B6B"/>
                 </a:solidFill>
                 <a:latin typeface="Calibri"/>
               </a:rPr>
-              <a:t>Each bar = how many times more common the condition is in women than men.</a:t>
+              <a:t>.</a:t>
+            </a:r>
+          </a:p>
+        </p:txBody>
+      </p:sp>
+      <p:sp>
+        <p:nvSpPr>
+          <p:cNvPr id="5" name="Rounded Rectangle 4"/>
+          <p:cNvSpPr/>
+          <p:nvPr/>
+        </p:nvSpPr>
+        <p:spPr>
+          <a:xfrm>
+            <a:off x="7697096" y="1253848"/>
+            <a:ext cx="3974950" cy="2389206"/>
+          </a:xfrm>
+          <a:prstGeom prst="roundRect">
+            <a:avLst>
+              <a:gd name="adj" fmla="val 6000"/>
+            </a:avLst>
+          </a:prstGeom>
+          <a:solidFill>
+            <a:srgbClr val="FAEEDA"/>
+          </a:solidFill>
+          <a:ln>
+            <a:noFill/>
+          </a:ln>
+        </p:spPr>
+        <p:style>
+          <a:lnRef idx="1">
+            <a:schemeClr val="accent1"/>
+          </a:lnRef>
+          <a:fillRef idx="3">
+            <a:schemeClr val="accent1"/>
+          </a:fillRef>
+          <a:effectRef idx="2">
+            <a:schemeClr val="accent1"/>
+          </a:effectRef>
+          <a:fontRef idx="minor">
+            <a:schemeClr val="lt1"/>
+          </a:fontRef>
+        </p:style>
+        <p:txBody>
+          <a:bodyPr rtlCol="0" anchor="ctr"/>
+          <a:lstStyle/>
+          <a:p>
+            <a:pPr algn="ctr"/>
+            <a:endParaRPr/>
+          </a:p>
+        </p:txBody>
+      </p:sp>
+      <p:sp>
+        <p:nvSpPr>
+          <p:cNvPr id="6" name="TextBox 5"/>
+          <p:cNvSpPr txBox="1"/>
+          <p:nvPr/>
+        </p:nvSpPr>
+        <p:spPr>
+          <a:xfrm>
+            <a:off x="8218842" y="1416357"/>
+            <a:ext cx="2926080" cy="276999"/>
+          </a:xfrm>
+          <a:prstGeom prst="rect">
+            <a:avLst/>
+          </a:prstGeom>
+          <a:noFill/>
+        </p:spPr>
+        <p:txBody>
+          <a:bodyPr wrap="square" lIns="0" tIns="0" rIns="0" bIns="0" anchor="t">
+            <a:spAutoFit/>
+          </a:bodyPr>
+          <a:lstStyle/>
+          <a:p>
+            <a:pPr algn="ctr"/>
+            <a:r>
+              <a:rPr b="1" dirty="0">
+                <a:solidFill>
+                  <a:srgbClr val="633806"/>
+                </a:solidFill>
+                <a:latin typeface="Calibri"/>
+              </a:rPr>
+              <a:t>FEMALE-TO-MALE RATIO</a:t>
+            </a:r>
+          </a:p>
+        </p:txBody>
+      </p:sp>
+      <p:sp>
+        <p:nvSpPr>
+          <p:cNvPr id="7" name="TextBox 6"/>
+          <p:cNvSpPr txBox="1"/>
+          <p:nvPr/>
+        </p:nvSpPr>
+        <p:spPr>
+          <a:xfrm>
+            <a:off x="8218842" y="1745500"/>
+            <a:ext cx="2926080" cy="1107996"/>
+          </a:xfrm>
+          <a:prstGeom prst="rect">
+            <a:avLst/>
+          </a:prstGeom>
+          <a:noFill/>
+        </p:spPr>
+        <p:txBody>
+          <a:bodyPr wrap="square" lIns="0" tIns="0" rIns="0" bIns="0" anchor="t">
+            <a:spAutoFit/>
+          </a:bodyPr>
+          <a:lstStyle/>
+          <a:p>
+            <a:pPr algn="ctr"/>
+            <a:r>
+              <a:rPr lang="en-GB" sz="7200" b="1" dirty="0">
+                <a:solidFill>
+                  <a:srgbClr val="BA7517"/>
+                </a:solidFill>
+              </a:rPr>
+              <a:t>4.5:1</a:t>
+            </a:r>
+          </a:p>
+        </p:txBody>
+      </p:sp>
+      <p:sp>
+        <p:nvSpPr>
+          <p:cNvPr id="8" name="TextBox 7"/>
+          <p:cNvSpPr txBox="1"/>
+          <p:nvPr/>
+        </p:nvSpPr>
+        <p:spPr>
+          <a:xfrm>
+            <a:off x="7697096" y="2791864"/>
+            <a:ext cx="3974950" cy="830997"/>
+          </a:xfrm>
+          <a:prstGeom prst="rect">
+            <a:avLst/>
+          </a:prstGeom>
+          <a:noFill/>
+        </p:spPr>
+        <p:txBody>
+          <a:bodyPr wrap="square" lIns="0" tIns="0" rIns="0" bIns="0" anchor="t">
+            <a:spAutoFit/>
+          </a:bodyPr>
+          <a:lstStyle/>
+          <a:p>
+            <a:pPr algn="ctr"/>
+            <a:r>
+              <a:rPr lang="en-GB" dirty="0">
+                <a:solidFill>
+                  <a:srgbClr val="854F0B"/>
+                </a:solidFill>
+              </a:rPr>
+              <a:t>Women over 50 are about 4.5 times more likely to be diagnosed with osteoporosis than men.</a:t>
+            </a:r>
+          </a:p>
+        </p:txBody>
+      </p:sp>
+      <p:cxnSp>
+        <p:nvCxnSpPr>
+          <p:cNvPr id="9" name="Connector 8"/>
+          <p:cNvCxnSpPr/>
+          <p:nvPr/>
+        </p:nvCxnSpPr>
+        <p:spPr>
+          <a:xfrm>
+            <a:off x="457198" y="6039630"/>
+            <a:ext cx="11093824" cy="16136"/>
+          </a:xfrm>
+          <a:prstGeom prst="line">
+            <a:avLst/>
+          </a:prstGeom>
+          <a:ln w="6350">
+            <a:solidFill>
+              <a:srgbClr val="E0D8F0"/>
+            </a:solidFill>
+          </a:ln>
+        </p:spPr>
+        <p:style>
+          <a:lnRef idx="2">
+            <a:schemeClr val="accent1"/>
+          </a:lnRef>
+          <a:fillRef idx="0">
+            <a:schemeClr val="accent1"/>
+          </a:fillRef>
+          <a:effectRef idx="1">
+            <a:schemeClr val="accent1"/>
+          </a:effectRef>
+          <a:fontRef idx="minor">
+            <a:schemeClr val="tx1"/>
+          </a:fontRef>
+        </p:style>
+      </p:cxnSp>
+      <p:sp>
+        <p:nvSpPr>
+          <p:cNvPr id="10" name="TextBox 9"/>
+          <p:cNvSpPr txBox="1"/>
+          <p:nvPr/>
+        </p:nvSpPr>
+        <p:spPr>
+          <a:xfrm>
+            <a:off x="457200" y="6492240"/>
+            <a:ext cx="8229600" cy="276999"/>
+          </a:xfrm>
+          <a:prstGeom prst="rect">
+            <a:avLst/>
+          </a:prstGeom>
+          <a:noFill/>
+        </p:spPr>
+        <p:txBody>
+          <a:bodyPr wrap="square" lIns="0" tIns="0" rIns="0" bIns="0">
+            <a:spAutoFit/>
+          </a:bodyPr>
+          <a:lstStyle/>
+          <a:p>
+            <a:r>
+              <a:rPr lang="en-GB" sz="900" dirty="0">
+                <a:solidFill>
+                  <a:srgbClr val="AAAAAA"/>
+                </a:solidFill>
+              </a:rPr>
+              <a:t>[2] </a:t>
+            </a:r>
+            <a:r>
+              <a:rPr lang="en-GB" sz="900" dirty="0" err="1">
+                <a:solidFill>
+                  <a:srgbClr val="AAAAAA"/>
+                </a:solidFill>
+              </a:rPr>
+              <a:t>Sarafrazi</a:t>
+            </a:r>
+            <a:r>
+              <a:rPr lang="en-GB" sz="900" dirty="0">
+                <a:solidFill>
+                  <a:srgbClr val="AAAAAA"/>
+                </a:solidFill>
+              </a:rPr>
+              <a:t> N, </a:t>
+            </a:r>
+            <a:r>
+              <a:rPr lang="en-GB" sz="900" dirty="0" err="1">
+                <a:solidFill>
+                  <a:srgbClr val="AAAAAA"/>
+                </a:solidFill>
+              </a:rPr>
+              <a:t>Wambogo</a:t>
+            </a:r>
+            <a:r>
+              <a:rPr lang="en-GB" sz="900" dirty="0">
+                <a:solidFill>
+                  <a:srgbClr val="AAAAAA"/>
+                </a:solidFill>
+              </a:rPr>
+              <a:t> EA, Shepherd JA. Osteoporosis or Low Bone Mass in Older Adults, United States, 2017-2018. CDC NCHS Data Brief No. 405, 2021 · https://www.cdc.gov/nchs/products/databriefs/db405.htm</a:t>
             </a:r>
           </a:p>
         </p:txBody>
       </p:sp>
     </p:spTree>
+    <p:extLst>
+      <p:ext uri="{BB962C8B-B14F-4D97-AF65-F5344CB8AC3E}">
+        <p14:creationId xmlns:p14="http://schemas.microsoft.com/office/powerpoint/2010/main" val="1940382425"/>
+      </p:ext>
+    </p:extLst>
   </p:cSld>
   <p:clrMapOvr>
     <a:masterClrMapping/>
@@ -3948,8 +4709,8 @@
 </p:sld>
 </file>
 
-<file path=ppt/slides/slide4.xml><?xml version="1.0" encoding="utf-8"?>
-<p:sld xmlns:a="http://schemas.openxmlformats.org/drawingml/2006/main" xmlns:p="http://schemas.openxmlformats.org/presentationml/2006/main" xmlns:r="http://schemas.openxmlformats.org/officeDocument/2006/relationships">
+<file path=ppt/slides/slide5.xml><?xml version="1.0" encoding="utf-8"?>
+<p:sld xmlns:a="http://schemas.openxmlformats.org/drawingml/2006/main" xmlns:r="http://schemas.openxmlformats.org/officeDocument/2006/relationships" xmlns:p="http://schemas.openxmlformats.org/presentationml/2006/main">
   <p:cSld>
     <p:bg>
       <p:bgPr>
@@ -3965,7 +4726,14 @@
         <p:cNvGrpSpPr/>
         <p:nvPr/>
       </p:nvGrpSpPr>
-      <p:grpSpPr/>
+      <p:grpSpPr>
+        <a:xfrm>
+          <a:off x="0" y="0"/>
+          <a:ext cx="0" cy="0"/>
+          <a:chOff x="0" y="0"/>
+          <a:chExt cx="0" cy="0"/>
+        </a:xfrm>
+      </p:grpSpPr>
       <p:sp>
         <p:nvSpPr>
           <p:cNvPr id="2" name="Rounded Rectangle 1"/>
@@ -3974,8 +4742,8 @@
         </p:nvSpPr>
         <p:spPr>
           <a:xfrm>
-            <a:off x="457200" y="502920"/>
-            <a:ext cx="1463040" cy="256032"/>
+            <a:off x="457199" y="381898"/>
+            <a:ext cx="11214847" cy="365760"/>
           </a:xfrm>
           <a:prstGeom prst="roundRect">
             <a:avLst>
@@ -4004,18 +4772,17 @@
           </a:fontRef>
         </p:style>
         <p:txBody>
-          <a:bodyPr rtlCol="0" anchor="ctr" lIns="0" rIns="0" tIns="0" bIns="0"/>
+          <a:bodyPr lIns="0" tIns="0" rIns="0" bIns="0" rtlCol="0" anchor="ctr"/>
           <a:lstStyle/>
           <a:p>
             <a:pPr algn="ctr"/>
             <a:r>
-              <a:rPr sz="900" b="1">
+              <a:rPr lang="en-GB" sz="1600" b="1" dirty="0">
                 <a:solidFill>
                   <a:srgbClr val="534AB7"/>
                 </a:solidFill>
-                <a:latin typeface="Calibri"/>
-              </a:rPr>
-              <a:t>AUTOIMMUNE</a:t>
+              </a:rPr>
+              <a:t>NEUROLOGICAL</a:t>
             </a:r>
           </a:p>
         </p:txBody>
@@ -4028,8 +4795,8 @@
         </p:nvSpPr>
         <p:spPr>
           <a:xfrm>
-            <a:off x="457200" y="914400"/>
-            <a:ext cx="5029200" cy="457200"/>
+            <a:off x="457198" y="1290599"/>
+            <a:ext cx="6715461" cy="492443"/>
           </a:xfrm>
           <a:prstGeom prst="rect">
             <a:avLst/>
@@ -4037,20 +4804,18 @@
           <a:noFill/>
         </p:spPr>
         <p:txBody>
-          <a:bodyPr wrap="square" lIns="0" rIns="0" tIns="0" bIns="0" anchor="t">
+          <a:bodyPr wrap="square" lIns="0" tIns="0" rIns="0" bIns="0" anchor="t">
             <a:spAutoFit/>
           </a:bodyPr>
           <a:lstStyle/>
           <a:p>
-            <a:pPr algn="l"/>
-            <a:r>
-              <a:rPr sz="2200" b="0">
+            <a:r>
+              <a:rPr lang="en-GB" sz="3200" b="1" dirty="0">
                 <a:solidFill>
                   <a:srgbClr val="3D2B56"/>
                 </a:solidFill>
-                <a:latin typeface="Calibri"/>
-              </a:rPr>
-              <a:t>Systemic Lupus Erythematosus (Lupus)</a:t>
+              </a:rPr>
+              <a:t>Migraine</a:t>
             </a:r>
           </a:p>
         </p:txBody>
@@ -4063,8 +4828,8 @@
         </p:nvSpPr>
         <p:spPr>
           <a:xfrm>
-            <a:off x="457200" y="1417320"/>
-            <a:ext cx="4754880" cy="868680"/>
+            <a:off x="457200" y="1993820"/>
+            <a:ext cx="6715462" cy="1723549"/>
           </a:xfrm>
           <a:prstGeom prst="rect">
             <a:avLst/>
@@ -4072,20 +4837,18 @@
           <a:noFill/>
         </p:spPr>
         <p:txBody>
-          <a:bodyPr wrap="square" lIns="0" rIns="0" tIns="0" bIns="0" anchor="t">
+          <a:bodyPr wrap="square" lIns="0" tIns="0" rIns="0" bIns="0" anchor="t">
             <a:spAutoFit/>
           </a:bodyPr>
           <a:lstStyle/>
           <a:p>
-            <a:pPr algn="l"/>
-            <a:r>
-              <a:rPr sz="1300" b="0">
+            <a:r>
+              <a:rPr lang="en-GB" sz="2800" dirty="0">
                 <a:solidFill>
                   <a:srgbClr val="6B6B6B"/>
                 </a:solidFill>
-                <a:latin typeface="Calibri"/>
-              </a:rPr>
-              <a:t>A chronic autoimmune disease where the body's immune system attacks its own tissues — skin, joints, kidneys, heart and brain.</a:t>
+              </a:rPr>
+              <a:t>More than a bad headache — recurring, often disabling neurological attacks with nausea, light and sound sensitivity that can last for days.</a:t>
             </a:r>
           </a:p>
         </p:txBody>
@@ -4098,8 +4861,8 @@
         </p:nvSpPr>
         <p:spPr>
           <a:xfrm>
-            <a:off x="5760720" y="411480"/>
-            <a:ext cx="2926080" cy="1737360"/>
+            <a:off x="7697096" y="1410617"/>
+            <a:ext cx="3974950" cy="2389206"/>
           </a:xfrm>
           <a:prstGeom prst="roundRect">
             <a:avLst>
@@ -4132,6 +4895,7 @@
           <a:lstStyle/>
           <a:p>
             <a:pPr algn="ctr"/>
+            <a:endParaRPr/>
           </a:p>
         </p:txBody>
       </p:sp>
@@ -4143,8 +4907,8 @@
         </p:nvSpPr>
         <p:spPr>
           <a:xfrm>
-            <a:off x="5760720" y="548640"/>
-            <a:ext cx="2926080" cy="228600"/>
+            <a:off x="8221531" y="1596376"/>
+            <a:ext cx="2926080" cy="276999"/>
           </a:xfrm>
           <a:prstGeom prst="rect">
             <a:avLst/>
@@ -4152,14 +4916,14 @@
           <a:noFill/>
         </p:spPr>
         <p:txBody>
-          <a:bodyPr wrap="square" lIns="0" rIns="0" tIns="0" bIns="0" anchor="t">
+          <a:bodyPr wrap="square" lIns="0" tIns="0" rIns="0" bIns="0" anchor="t">
             <a:spAutoFit/>
           </a:bodyPr>
           <a:lstStyle/>
           <a:p>
             <a:pPr algn="ctr"/>
             <a:r>
-              <a:rPr sz="900" b="1">
+              <a:rPr b="1" dirty="0">
                 <a:solidFill>
                   <a:srgbClr val="633806"/>
                 </a:solidFill>
@@ -4178,8 +4942,8 @@
         </p:nvSpPr>
         <p:spPr>
           <a:xfrm>
-            <a:off x="5760720" y="777240"/>
-            <a:ext cx="2926080" cy="731520"/>
+            <a:off x="8221531" y="1966254"/>
+            <a:ext cx="2926080" cy="1107996"/>
           </a:xfrm>
           <a:prstGeom prst="rect">
             <a:avLst/>
@@ -4187,20 +4951,19 @@
           <a:noFill/>
         </p:spPr>
         <p:txBody>
-          <a:bodyPr wrap="square" lIns="0" rIns="0" tIns="0" bIns="0" anchor="t">
+          <a:bodyPr wrap="square" lIns="0" tIns="0" rIns="0" bIns="0" anchor="t">
             <a:spAutoFit/>
           </a:bodyPr>
           <a:lstStyle/>
           <a:p>
             <a:pPr algn="ctr"/>
             <a:r>
-              <a:rPr sz="5200" b="1">
+              <a:rPr lang="en-GB" sz="7200" b="1" dirty="0">
                 <a:solidFill>
                   <a:srgbClr val="BA7517"/>
                 </a:solidFill>
-                <a:latin typeface="Calibri"/>
-              </a:rPr>
-              <a:t>9:1</a:t>
+              </a:rPr>
+              <a:t>3:1</a:t>
             </a:r>
           </a:p>
         </p:txBody>
@@ -4213,8 +4976,8 @@
         </p:nvSpPr>
         <p:spPr>
           <a:xfrm>
-            <a:off x="5760720" y="1508760"/>
-            <a:ext cx="2926080" cy="548640"/>
+            <a:off x="7697096" y="3136352"/>
+            <a:ext cx="3974950" cy="553998"/>
           </a:xfrm>
           <a:prstGeom prst="rect">
             <a:avLst/>
@@ -4222,20 +4985,19 @@
           <a:noFill/>
         </p:spPr>
         <p:txBody>
-          <a:bodyPr wrap="square" lIns="0" rIns="0" tIns="0" bIns="0" anchor="t">
+          <a:bodyPr wrap="square" lIns="0" tIns="0" rIns="0" bIns="0" anchor="t">
             <a:spAutoFit/>
           </a:bodyPr>
           <a:lstStyle/>
           <a:p>
             <a:pPr algn="ctr"/>
             <a:r>
-              <a:rPr sz="1100" b="0">
+              <a:rPr lang="en-GB" dirty="0">
                 <a:solidFill>
                   <a:srgbClr val="854F0B"/>
                 </a:solidFill>
-                <a:latin typeface="Calibri"/>
-              </a:rPr>
-              <a:t>Nine out of every ten people living with lupus are women.</a:t>
+              </a:rPr>
+              <a:t>Migraine is the leading cause of disability for women under 50 worldwide.</a:t>
             </a:r>
           </a:p>
         </p:txBody>
@@ -4248,8 +5010,8 @@
         </p:nvCxnSpPr>
         <p:spPr>
           <a:xfrm>
-            <a:off x="457200" y="2331720"/>
-            <a:ext cx="8229600" cy="0"/>
+            <a:off x="457198" y="6039630"/>
+            <a:ext cx="11093824" cy="16136"/>
           </a:xfrm>
           <a:prstGeom prst="line">
             <a:avLst/>
@@ -4283,8 +5045,8 @@
         </p:nvSpPr>
         <p:spPr>
           <a:xfrm>
-            <a:off x="457200" y="4709160"/>
-            <a:ext cx="8229600" cy="365760"/>
+            <a:off x="457200" y="6492240"/>
+            <a:ext cx="8229600" cy="276999"/>
           </a:xfrm>
           <a:prstGeom prst="rect">
             <a:avLst/>
@@ -4292,25 +5054,44 @@
           <a:noFill/>
         </p:spPr>
         <p:txBody>
-          <a:bodyPr wrap="square" lIns="0" rIns="0" tIns="0" bIns="0">
+          <a:bodyPr wrap="square" lIns="0" tIns="0" rIns="0" bIns="0">
             <a:spAutoFit/>
           </a:bodyPr>
           <a:lstStyle/>
           <a:p>
-            <a:pPr algn="l"/>
-            <a:r>
-              <a:rPr sz="900">
+            <a:r>
+              <a:rPr lang="en-GB" sz="900" dirty="0">
                 <a:solidFill>
                   <a:srgbClr val="AAAAAA"/>
                 </a:solidFill>
-                <a:latin typeface="Calibri"/>
-              </a:rPr>
-              <a:t>[1] Sex- and gender-related differences in systemic lupus erythematosus: a scoping review (PMC, 2024) · https://pmc.ncbi.nlm.nih.gov/articles/PMC12204902/</a:t>
+              </a:rPr>
+              <a:t>[3] </a:t>
+            </a:r>
+            <a:r>
+              <a:rPr lang="en-GB" sz="900" dirty="0" err="1">
+                <a:solidFill>
+                  <a:srgbClr val="AAAAAA"/>
+                </a:solidFill>
+              </a:rPr>
+              <a:t>Buse</a:t>
+            </a:r>
+            <a:r>
+              <a:rPr lang="en-GB" sz="900" dirty="0">
+                <a:solidFill>
+                  <a:srgbClr val="AAAAAA"/>
+                </a:solidFill>
+              </a:rPr>
+              <a:t> DC et al. Sex differences in the prevalence, symptoms, and associated features of migraine — AMPP Study. PubMed, 2013 · https://pubmed.ncbi.nlm.nih.gov/23808666/</a:t>
             </a:r>
           </a:p>
         </p:txBody>
       </p:sp>
     </p:spTree>
+    <p:extLst>
+      <p:ext uri="{BB962C8B-B14F-4D97-AF65-F5344CB8AC3E}">
+        <p14:creationId xmlns:p14="http://schemas.microsoft.com/office/powerpoint/2010/main" val="1768420183"/>
+      </p:ext>
+    </p:extLst>
   </p:cSld>
   <p:clrMapOvr>
     <a:masterClrMapping/>
@@ -4318,8 +5099,8 @@
 </p:sld>
 </file>
 
-<file path=ppt/slides/slide5.xml><?xml version="1.0" encoding="utf-8"?>
-<p:sld xmlns:a="http://schemas.openxmlformats.org/drawingml/2006/main" xmlns:p="http://schemas.openxmlformats.org/presentationml/2006/main" xmlns:r="http://schemas.openxmlformats.org/officeDocument/2006/relationships">
+<file path=ppt/slides/slide6.xml><?xml version="1.0" encoding="utf-8"?>
+<p:sld xmlns:a="http://schemas.openxmlformats.org/drawingml/2006/main" xmlns:r="http://schemas.openxmlformats.org/officeDocument/2006/relationships" xmlns:p="http://schemas.openxmlformats.org/presentationml/2006/main">
   <p:cSld>
     <p:bg>
       <p:bgPr>
@@ -4335,7 +5116,14 @@
         <p:cNvGrpSpPr/>
         <p:nvPr/>
       </p:nvGrpSpPr>
-      <p:grpSpPr/>
+      <p:grpSpPr>
+        <a:xfrm>
+          <a:off x="0" y="0"/>
+          <a:ext cx="0" cy="0"/>
+          <a:chOff x="0" y="0"/>
+          <a:chExt cx="0" cy="0"/>
+        </a:xfrm>
+      </p:grpSpPr>
       <p:sp>
         <p:nvSpPr>
           <p:cNvPr id="2" name="Rounded Rectangle 1"/>
@@ -4344,8 +5132,8 @@
         </p:nvSpPr>
         <p:spPr>
           <a:xfrm>
-            <a:off x="457200" y="502920"/>
-            <a:ext cx="1463040" cy="256032"/>
+            <a:off x="457199" y="381898"/>
+            <a:ext cx="11214847" cy="365760"/>
           </a:xfrm>
           <a:prstGeom prst="roundRect">
             <a:avLst>
@@ -4374,18 +5162,17 @@
           </a:fontRef>
         </p:style>
         <p:txBody>
-          <a:bodyPr rtlCol="0" anchor="ctr" lIns="0" rIns="0" tIns="0" bIns="0"/>
+          <a:bodyPr lIns="0" tIns="0" rIns="0" bIns="0" rtlCol="0" anchor="ctr"/>
           <a:lstStyle/>
           <a:p>
             <a:pPr algn="ctr"/>
             <a:r>
-              <a:rPr sz="900" b="1">
+              <a:rPr lang="en-GB" sz="1600" b="1" dirty="0">
                 <a:solidFill>
                   <a:srgbClr val="534AB7"/>
                 </a:solidFill>
-                <a:latin typeface="Calibri"/>
-              </a:rPr>
-              <a:t>MUSCULOSKELETAL</a:t>
+              </a:rPr>
+              <a:t>NEURODEGENERATIVE</a:t>
             </a:r>
           </a:p>
         </p:txBody>
@@ -4398,8 +5185,8 @@
         </p:nvSpPr>
         <p:spPr>
           <a:xfrm>
-            <a:off x="457200" y="914400"/>
-            <a:ext cx="5029200" cy="457200"/>
+            <a:off x="457198" y="1290599"/>
+            <a:ext cx="6715461" cy="492443"/>
           </a:xfrm>
           <a:prstGeom prst="rect">
             <a:avLst/>
@@ -4407,20 +5194,18 @@
           <a:noFill/>
         </p:spPr>
         <p:txBody>
-          <a:bodyPr wrap="square" lIns="0" rIns="0" tIns="0" bIns="0" anchor="t">
+          <a:bodyPr wrap="square" lIns="0" tIns="0" rIns="0" bIns="0" anchor="t">
             <a:spAutoFit/>
           </a:bodyPr>
           <a:lstStyle/>
           <a:p>
-            <a:pPr algn="l"/>
-            <a:r>
-              <a:rPr sz="2200" b="0">
+            <a:r>
+              <a:rPr lang="en-GB" sz="3200" b="1" dirty="0">
                 <a:solidFill>
                   <a:srgbClr val="3D2B56"/>
                 </a:solidFill>
-                <a:latin typeface="Calibri"/>
-              </a:rPr>
-              <a:t>Osteoporosis</a:t>
+              </a:rPr>
+              <a:t>Alzheimer's Disease</a:t>
             </a:r>
           </a:p>
         </p:txBody>
@@ -4433,8 +5218,8 @@
         </p:nvSpPr>
         <p:spPr>
           <a:xfrm>
-            <a:off x="457200" y="1417320"/>
-            <a:ext cx="4754880" cy="868680"/>
+            <a:off x="457200" y="1993820"/>
+            <a:ext cx="6715462" cy="1292662"/>
           </a:xfrm>
           <a:prstGeom prst="rect">
             <a:avLst/>
@@ -4442,20 +5227,18 @@
           <a:noFill/>
         </p:spPr>
         <p:txBody>
-          <a:bodyPr wrap="square" lIns="0" rIns="0" tIns="0" bIns="0" anchor="t">
+          <a:bodyPr wrap="square" lIns="0" tIns="0" rIns="0" bIns="0" anchor="t">
             <a:spAutoFit/>
           </a:bodyPr>
           <a:lstStyle/>
           <a:p>
-            <a:pPr algn="l"/>
-            <a:r>
-              <a:rPr sz="1300" b="0">
+            <a:r>
+              <a:rPr lang="en-GB" sz="2800" dirty="0">
                 <a:solidFill>
                   <a:srgbClr val="6B6B6B"/>
                 </a:solidFill>
-                <a:latin typeface="Calibri"/>
-              </a:rPr>
-              <a:t>A silent bone-thinning disease that makes fractures much more likely after age 50 — often discovered only after a broken hip or wrist.</a:t>
+              </a:rPr>
+              <a:t>A progressive brain disease that destroys memory and thinking — the most common cause of dementia in older adults.</a:t>
             </a:r>
           </a:p>
         </p:txBody>
@@ -4468,8 +5251,8 @@
         </p:nvSpPr>
         <p:spPr>
           <a:xfrm>
-            <a:off x="5760720" y="411480"/>
-            <a:ext cx="2926080" cy="1737360"/>
+            <a:off x="7697096" y="1410617"/>
+            <a:ext cx="3974950" cy="2389206"/>
           </a:xfrm>
           <a:prstGeom prst="roundRect">
             <a:avLst>
@@ -4502,6 +5285,7 @@
           <a:lstStyle/>
           <a:p>
             <a:pPr algn="ctr"/>
+            <a:endParaRPr/>
           </a:p>
         </p:txBody>
       </p:sp>
@@ -4513,8 +5297,8 @@
         </p:nvSpPr>
         <p:spPr>
           <a:xfrm>
-            <a:off x="5760720" y="548640"/>
-            <a:ext cx="2926080" cy="228600"/>
+            <a:off x="8221531" y="1596376"/>
+            <a:ext cx="2926080" cy="276999"/>
           </a:xfrm>
           <a:prstGeom prst="rect">
             <a:avLst/>
@@ -4522,14 +5306,14 @@
           <a:noFill/>
         </p:spPr>
         <p:txBody>
-          <a:bodyPr wrap="square" lIns="0" rIns="0" tIns="0" bIns="0" anchor="t">
+          <a:bodyPr wrap="square" lIns="0" tIns="0" rIns="0" bIns="0" anchor="t">
             <a:spAutoFit/>
           </a:bodyPr>
           <a:lstStyle/>
           <a:p>
             <a:pPr algn="ctr"/>
             <a:r>
-              <a:rPr sz="900" b="1">
+              <a:rPr b="1" dirty="0">
                 <a:solidFill>
                   <a:srgbClr val="633806"/>
                 </a:solidFill>
@@ -4548,8 +5332,8 @@
         </p:nvSpPr>
         <p:spPr>
           <a:xfrm>
-            <a:off x="5760720" y="777240"/>
-            <a:ext cx="2926080" cy="731520"/>
+            <a:off x="8221531" y="1966254"/>
+            <a:ext cx="2926080" cy="1107996"/>
           </a:xfrm>
           <a:prstGeom prst="rect">
             <a:avLst/>
@@ -4557,20 +5341,19 @@
           <a:noFill/>
         </p:spPr>
         <p:txBody>
-          <a:bodyPr wrap="square" lIns="0" rIns="0" tIns="0" bIns="0" anchor="t">
+          <a:bodyPr wrap="square" lIns="0" tIns="0" rIns="0" bIns="0" anchor="t">
             <a:spAutoFit/>
           </a:bodyPr>
           <a:lstStyle/>
           <a:p>
             <a:pPr algn="ctr"/>
             <a:r>
-              <a:rPr sz="5200" b="1">
+              <a:rPr lang="en-GB" sz="7200" b="1" dirty="0">
                 <a:solidFill>
                   <a:srgbClr val="BA7517"/>
                 </a:solidFill>
-                <a:latin typeface="Calibri"/>
-              </a:rPr>
-              <a:t>4.5:1</a:t>
+              </a:rPr>
+              <a:t>2:1</a:t>
             </a:r>
           </a:p>
         </p:txBody>
@@ -4583,8 +5366,8 @@
         </p:nvSpPr>
         <p:spPr>
           <a:xfrm>
-            <a:off x="5760720" y="1508760"/>
-            <a:ext cx="2926080" cy="548640"/>
+            <a:off x="7697096" y="3136352"/>
+            <a:ext cx="3974950" cy="553998"/>
           </a:xfrm>
           <a:prstGeom prst="rect">
             <a:avLst/>
@@ -4592,20 +5375,19 @@
           <a:noFill/>
         </p:spPr>
         <p:txBody>
-          <a:bodyPr wrap="square" lIns="0" rIns="0" tIns="0" bIns="0" anchor="t">
+          <a:bodyPr wrap="square" lIns="0" tIns="0" rIns="0" bIns="0" anchor="t">
             <a:spAutoFit/>
           </a:bodyPr>
           <a:lstStyle/>
           <a:p>
             <a:pPr algn="ctr"/>
             <a:r>
-              <a:rPr sz="1100" b="0">
+              <a:rPr lang="en-GB" dirty="0">
                 <a:solidFill>
                   <a:srgbClr val="854F0B"/>
                 </a:solidFill>
-                <a:latin typeface="Calibri"/>
-              </a:rPr>
-              <a:t>Women over 50 carry roughly 4.5x the diagnosed osteoporosis risk of men.</a:t>
+              </a:rPr>
+              <a:t>By age 45, a woman's lifetime risk of Alzheimer's is 1 in 5 — twice a man's.</a:t>
             </a:r>
           </a:p>
         </p:txBody>
@@ -4618,8 +5400,8 @@
         </p:nvCxnSpPr>
         <p:spPr>
           <a:xfrm>
-            <a:off x="457200" y="2331720"/>
-            <a:ext cx="8229600" cy="0"/>
+            <a:off x="457198" y="6039630"/>
+            <a:ext cx="11093824" cy="16136"/>
           </a:xfrm>
           <a:prstGeom prst="line">
             <a:avLst/>
@@ -4647,40 +5429,55 @@
       </p:cxnSp>
       <p:sp>
         <p:nvSpPr>
-          <p:cNvPr id="10" name="TextBox 9"/>
-          <p:cNvSpPr txBox="1"/>
+          <p:cNvPr id="11" name="Rectangle 10"/>
+          <p:cNvSpPr/>
           <p:nvPr/>
         </p:nvSpPr>
         <p:spPr>
           <a:xfrm>
-            <a:off x="457200" y="4709160"/>
-            <a:ext cx="8229600" cy="365760"/>
+            <a:off x="407893" y="6552971"/>
+            <a:ext cx="11192434" cy="230832"/>
           </a:xfrm>
           <a:prstGeom prst="rect">
             <a:avLst/>
           </a:prstGeom>
-          <a:noFill/>
-        </p:spPr>
-        <p:txBody>
-          <a:bodyPr wrap="square" lIns="0" rIns="0" tIns="0" bIns="0">
+        </p:spPr>
+        <p:txBody>
+          <a:bodyPr wrap="square">
             <a:spAutoFit/>
           </a:bodyPr>
           <a:lstStyle/>
           <a:p>
-            <a:pPr algn="l"/>
-            <a:r>
-              <a:rPr sz="900">
+            <a:pPr>
+              <a:spcAft>
+                <a:spcPts val="800"/>
+              </a:spcAft>
+            </a:pPr>
+            <a:r>
+              <a:rPr lang="en-GB" sz="900" dirty="0">
                 <a:solidFill>
                   <a:srgbClr val="AAAAAA"/>
                 </a:solidFill>
-                <a:latin typeface="Calibri"/>
-              </a:rPr>
-              <a:t>[2] Sarafrazi N, Wambogo EA, Shepherd JA. Osteoporosis or Low Bone Mass in Older Adults, United States, 2017-2018. CDC NCHS Data Brief No. 405, 2021 · https://www.cdc.gov/nchs/products/databriefs/db405.htm</a:t>
+              </a:rPr>
+              <a:t>[4] Alzheimer's Disease — Alzheimer's disease as a women's health challenge (PMC, 2024).  https://pmc.ncbi.nlm.nih.gov/articles/PMC11106001</a:t>
+            </a:r>
+            <a:r>
+              <a:rPr lang="en-GB" sz="900" dirty="0">
+                <a:solidFill>
+                  <a:srgbClr val="2C2C2C"/>
+                </a:solidFill>
+              </a:rPr>
+              <a:t>/</a:t>
             </a:r>
           </a:p>
         </p:txBody>
       </p:sp>
     </p:spTree>
+    <p:extLst>
+      <p:ext uri="{BB962C8B-B14F-4D97-AF65-F5344CB8AC3E}">
+        <p14:creationId xmlns:p14="http://schemas.microsoft.com/office/powerpoint/2010/main" val="2369404490"/>
+      </p:ext>
+    </p:extLst>
   </p:cSld>
   <p:clrMapOvr>
     <a:masterClrMapping/>
@@ -4688,8 +5485,8 @@
 </p:sld>
 </file>
 
-<file path=ppt/slides/slide6.xml><?xml version="1.0" encoding="utf-8"?>
-<p:sld xmlns:a="http://schemas.openxmlformats.org/drawingml/2006/main" xmlns:p="http://schemas.openxmlformats.org/presentationml/2006/main" xmlns:r="http://schemas.openxmlformats.org/officeDocument/2006/relationships">
+<file path=ppt/slides/slide7.xml><?xml version="1.0" encoding="utf-8"?>
+<p:sld xmlns:a="http://schemas.openxmlformats.org/drawingml/2006/main" xmlns:r="http://schemas.openxmlformats.org/officeDocument/2006/relationships" xmlns:p="http://schemas.openxmlformats.org/presentationml/2006/main">
   <p:cSld>
     <p:bg>
       <p:bgPr>
@@ -4705,7 +5502,14 @@
         <p:cNvGrpSpPr/>
         <p:nvPr/>
       </p:nvGrpSpPr>
-      <p:grpSpPr/>
+      <p:grpSpPr>
+        <a:xfrm>
+          <a:off x="0" y="0"/>
+          <a:ext cx="0" cy="0"/>
+          <a:chOff x="0" y="0"/>
+          <a:chExt cx="0" cy="0"/>
+        </a:xfrm>
+      </p:grpSpPr>
       <p:sp>
         <p:nvSpPr>
           <p:cNvPr id="2" name="Rounded Rectangle 1"/>
@@ -4714,8 +5518,8 @@
         </p:nvSpPr>
         <p:spPr>
           <a:xfrm>
-            <a:off x="457200" y="502920"/>
-            <a:ext cx="1463040" cy="256032"/>
+            <a:off x="457199" y="381898"/>
+            <a:ext cx="11214847" cy="365760"/>
           </a:xfrm>
           <a:prstGeom prst="roundRect">
             <a:avLst>
@@ -4744,18 +5548,17 @@
           </a:fontRef>
         </p:style>
         <p:txBody>
-          <a:bodyPr rtlCol="0" anchor="ctr" lIns="0" rIns="0" tIns="0" bIns="0"/>
+          <a:bodyPr lIns="0" tIns="0" rIns="0" bIns="0" rtlCol="0" anchor="ctr"/>
           <a:lstStyle/>
           <a:p>
             <a:pPr algn="ctr"/>
             <a:r>
-              <a:rPr sz="900" b="1">
+              <a:rPr lang="en-GB" sz="1600" b="1" dirty="0">
                 <a:solidFill>
                   <a:srgbClr val="534AB7"/>
                 </a:solidFill>
-                <a:latin typeface="Calibri"/>
-              </a:rPr>
-              <a:t>NEUROLOGICAL</a:t>
+              </a:rPr>
+              <a:t>MENTAL HEALTH</a:t>
             </a:r>
           </a:p>
         </p:txBody>
@@ -4768,8 +5571,8 @@
         </p:nvSpPr>
         <p:spPr>
           <a:xfrm>
-            <a:off x="457200" y="914400"/>
-            <a:ext cx="5029200" cy="457200"/>
+            <a:off x="457198" y="1290599"/>
+            <a:ext cx="6715461" cy="492443"/>
           </a:xfrm>
           <a:prstGeom prst="rect">
             <a:avLst/>
@@ -4777,20 +5580,18 @@
           <a:noFill/>
         </p:spPr>
         <p:txBody>
-          <a:bodyPr wrap="square" lIns="0" rIns="0" tIns="0" bIns="0" anchor="t">
+          <a:bodyPr wrap="square" lIns="0" tIns="0" rIns="0" bIns="0" anchor="t">
             <a:spAutoFit/>
           </a:bodyPr>
           <a:lstStyle/>
           <a:p>
-            <a:pPr algn="l"/>
-            <a:r>
-              <a:rPr sz="2200" b="0">
+            <a:r>
+              <a:rPr lang="en-GB" sz="3200" b="1" dirty="0">
                 <a:solidFill>
                   <a:srgbClr val="3D2B56"/>
                 </a:solidFill>
-                <a:latin typeface="Calibri"/>
-              </a:rPr>
-              <a:t>Migraine</a:t>
+              </a:rPr>
+              <a:t>Major Depression</a:t>
             </a:r>
           </a:p>
         </p:txBody>
@@ -4803,8 +5604,8 @@
         </p:nvSpPr>
         <p:spPr>
           <a:xfrm>
-            <a:off x="457200" y="1417320"/>
-            <a:ext cx="4754880" cy="868680"/>
+            <a:off x="457200" y="1993820"/>
+            <a:ext cx="6715462" cy="1292662"/>
           </a:xfrm>
           <a:prstGeom prst="rect">
             <a:avLst/>
@@ -4812,20 +5613,18 @@
           <a:noFill/>
         </p:spPr>
         <p:txBody>
-          <a:bodyPr wrap="square" lIns="0" rIns="0" tIns="0" bIns="0" anchor="t">
+          <a:bodyPr wrap="square" lIns="0" tIns="0" rIns="0" bIns="0" anchor="t">
             <a:spAutoFit/>
           </a:bodyPr>
           <a:lstStyle/>
           <a:p>
-            <a:pPr algn="l"/>
-            <a:r>
-              <a:rPr sz="1300" b="0">
+            <a:r>
+              <a:rPr lang="en-GB" sz="2800" dirty="0">
                 <a:solidFill>
                   <a:srgbClr val="6B6B6B"/>
                 </a:solidFill>
-                <a:latin typeface="Calibri"/>
-              </a:rPr>
-              <a:t>More than a bad headache — recurring, often disabling neurological attacks with nausea, light and sound sensitivity that can last for days.</a:t>
+              </a:rPr>
+              <a:t>A persistent mood disorder that affects how a person feels, thinks and handles daily life — far more than just sadness.</a:t>
             </a:r>
           </a:p>
         </p:txBody>
@@ -4838,8 +5637,8 @@
         </p:nvSpPr>
         <p:spPr>
           <a:xfrm>
-            <a:off x="5760720" y="411480"/>
-            <a:ext cx="2926080" cy="1737360"/>
+            <a:off x="7697096" y="1410617"/>
+            <a:ext cx="3974950" cy="2389206"/>
           </a:xfrm>
           <a:prstGeom prst="roundRect">
             <a:avLst>
@@ -4872,6 +5671,7 @@
           <a:lstStyle/>
           <a:p>
             <a:pPr algn="ctr"/>
+            <a:endParaRPr/>
           </a:p>
         </p:txBody>
       </p:sp>
@@ -4883,8 +5683,8 @@
         </p:nvSpPr>
         <p:spPr>
           <a:xfrm>
-            <a:off x="5760720" y="548640"/>
-            <a:ext cx="2926080" cy="228600"/>
+            <a:off x="8221531" y="1581242"/>
+            <a:ext cx="2926080" cy="276999"/>
           </a:xfrm>
           <a:prstGeom prst="rect">
             <a:avLst/>
@@ -4892,14 +5692,14 @@
           <a:noFill/>
         </p:spPr>
         <p:txBody>
-          <a:bodyPr wrap="square" lIns="0" rIns="0" tIns="0" bIns="0" anchor="t">
+          <a:bodyPr wrap="square" lIns="0" tIns="0" rIns="0" bIns="0" anchor="t">
             <a:spAutoFit/>
           </a:bodyPr>
           <a:lstStyle/>
           <a:p>
             <a:pPr algn="ctr"/>
             <a:r>
-              <a:rPr sz="900" b="1">
+              <a:rPr b="1" dirty="0">
                 <a:solidFill>
                   <a:srgbClr val="633806"/>
                 </a:solidFill>
@@ -4918,8 +5718,8 @@
         </p:nvSpPr>
         <p:spPr>
           <a:xfrm>
-            <a:off x="5760720" y="777240"/>
-            <a:ext cx="2926080" cy="731520"/>
+            <a:off x="8221531" y="1895899"/>
+            <a:ext cx="2926080" cy="1107996"/>
           </a:xfrm>
           <a:prstGeom prst="rect">
             <a:avLst/>
@@ -4927,20 +5727,19 @@
           <a:noFill/>
         </p:spPr>
         <p:txBody>
-          <a:bodyPr wrap="square" lIns="0" rIns="0" tIns="0" bIns="0" anchor="t">
+          <a:bodyPr wrap="square" lIns="0" tIns="0" rIns="0" bIns="0" anchor="t">
             <a:spAutoFit/>
           </a:bodyPr>
           <a:lstStyle/>
           <a:p>
             <a:pPr algn="ctr"/>
             <a:r>
-              <a:rPr sz="5200" b="1">
+              <a:rPr lang="en-GB" sz="7200" b="1" dirty="0">
                 <a:solidFill>
                   <a:srgbClr val="BA7517"/>
                 </a:solidFill>
-                <a:latin typeface="Calibri"/>
-              </a:rPr>
-              <a:t>3:1</a:t>
+              </a:rPr>
+              <a:t>2:1</a:t>
             </a:r>
           </a:p>
         </p:txBody>
@@ -4953,8 +5752,8 @@
         </p:nvSpPr>
         <p:spPr>
           <a:xfrm>
-            <a:off x="5760720" y="1508760"/>
-            <a:ext cx="2926080" cy="548640"/>
+            <a:off x="7697096" y="2987465"/>
+            <a:ext cx="3974950" cy="830997"/>
           </a:xfrm>
           <a:prstGeom prst="rect">
             <a:avLst/>
@@ -4962,20 +5761,19 @@
           <a:noFill/>
         </p:spPr>
         <p:txBody>
-          <a:bodyPr wrap="square" lIns="0" rIns="0" tIns="0" bIns="0" anchor="t">
+          <a:bodyPr wrap="square" lIns="0" tIns="0" rIns="0" bIns="0" anchor="t">
             <a:spAutoFit/>
           </a:bodyPr>
           <a:lstStyle/>
           <a:p>
             <a:pPr algn="ctr"/>
             <a:r>
-              <a:rPr sz="1100" b="0">
+              <a:rPr lang="en-GB" dirty="0">
                 <a:solidFill>
                   <a:srgbClr val="854F0B"/>
                 </a:solidFill>
-                <a:latin typeface="Calibri"/>
-              </a:rPr>
-              <a:t>Migraine is the leading cause of disability for women under 50 worldwide.</a:t>
+              </a:rPr>
+              <a:t>Twice as many women as men live with depression — in nearly every country measured.</a:t>
             </a:r>
           </a:p>
         </p:txBody>
@@ -4988,8 +5786,8 @@
         </p:nvCxnSpPr>
         <p:spPr>
           <a:xfrm>
-            <a:off x="457200" y="2331720"/>
-            <a:ext cx="8229600" cy="0"/>
+            <a:off x="457198" y="6039630"/>
+            <a:ext cx="11093824" cy="16136"/>
           </a:xfrm>
           <a:prstGeom prst="line">
             <a:avLst/>
@@ -5023,8 +5821,8 @@
         </p:nvSpPr>
         <p:spPr>
           <a:xfrm>
-            <a:off x="457200" y="4709160"/>
-            <a:ext cx="8229600" cy="365760"/>
+            <a:off x="457200" y="6492240"/>
+            <a:ext cx="8229600" cy="138499"/>
           </a:xfrm>
           <a:prstGeom prst="rect">
             <a:avLst/>
@@ -5032,25 +5830,28 @@
           <a:noFill/>
         </p:spPr>
         <p:txBody>
-          <a:bodyPr wrap="square" lIns="0" rIns="0" tIns="0" bIns="0">
+          <a:bodyPr wrap="square" lIns="0" tIns="0" rIns="0" bIns="0">
             <a:spAutoFit/>
           </a:bodyPr>
           <a:lstStyle/>
           <a:p>
-            <a:pPr algn="l"/>
-            <a:r>
-              <a:rPr sz="900">
+            <a:r>
+              <a:rPr lang="en-GB" sz="900" dirty="0">
                 <a:solidFill>
                   <a:srgbClr val="AAAAAA"/>
                 </a:solidFill>
-                <a:latin typeface="Calibri"/>
-              </a:rPr>
-              <a:t>[3] Buse DC et al. Sex differences in the prevalence, symptoms, and associated features of migraine — AMPP Study. PubMed, 2013 · https://pubmed.ncbi.nlm.nih.gov/23808666/</a:t>
+              </a:rPr>
+              <a:t>[5] Albert PR. Why is depression more prevalent in women? Journal of Psychiatry &amp; Neuroscience. PMC, 2015 · https://pmc.ncbi.nlm.nih.gov/articles/PMC4478054/</a:t>
             </a:r>
           </a:p>
         </p:txBody>
       </p:sp>
     </p:spTree>
+    <p:extLst>
+      <p:ext uri="{BB962C8B-B14F-4D97-AF65-F5344CB8AC3E}">
+        <p14:creationId xmlns:p14="http://schemas.microsoft.com/office/powerpoint/2010/main" val="3277557704"/>
+      </p:ext>
+    </p:extLst>
   </p:cSld>
   <p:clrMapOvr>
     <a:masterClrMapping/>
@@ -5058,8 +5859,8 @@
 </p:sld>
 </file>
 
-<file path=ppt/slides/slide7.xml><?xml version="1.0" encoding="utf-8"?>
-<p:sld xmlns:a="http://schemas.openxmlformats.org/drawingml/2006/main" xmlns:p="http://schemas.openxmlformats.org/presentationml/2006/main" xmlns:r="http://schemas.openxmlformats.org/officeDocument/2006/relationships">
+<file path=ppt/slides/slide8.xml><?xml version="1.0" encoding="utf-8"?>
+<p:sld xmlns:a="http://schemas.openxmlformats.org/drawingml/2006/main" xmlns:r="http://schemas.openxmlformats.org/officeDocument/2006/relationships" xmlns:p="http://schemas.openxmlformats.org/presentationml/2006/main">
   <p:cSld>
     <p:bg>
       <p:bgPr>
@@ -5075,25 +5876,32 @@
         <p:cNvGrpSpPr/>
         <p:nvPr/>
       </p:nvGrpSpPr>
-      <p:grpSpPr/>
-      <p:sp>
-        <p:nvSpPr>
-          <p:cNvPr id="2" name="Rounded Rectangle 1"/>
+      <p:grpSpPr>
+        <a:xfrm>
+          <a:off x="0" y="0"/>
+          <a:ext cx="0" cy="0"/>
+          <a:chOff x="0" y="0"/>
+          <a:chExt cx="0" cy="0"/>
+        </a:xfrm>
+      </p:grpSpPr>
+      <p:sp>
+        <p:nvSpPr>
+          <p:cNvPr id="5" name="Rounded Rectangle 4"/>
           <p:cNvSpPr/>
           <p:nvPr/>
         </p:nvSpPr>
         <p:spPr>
           <a:xfrm>
-            <a:off x="457200" y="502920"/>
-            <a:ext cx="1463040" cy="256032"/>
+            <a:off x="822960" y="1784165"/>
+            <a:ext cx="10515600" cy="1779306"/>
           </a:xfrm>
           <a:prstGeom prst="roundRect">
             <a:avLst>
-              <a:gd name="adj" fmla="val 50000"/>
+              <a:gd name="adj" fmla="val 6000"/>
             </a:avLst>
           </a:prstGeom>
           <a:solidFill>
-            <a:srgbClr val="EEEDFE"/>
+            <a:srgbClr val="F3EEF8"/>
           </a:solidFill>
           <a:ln>
             <a:noFill/>
@@ -5114,32 +5922,24 @@
           </a:fontRef>
         </p:style>
         <p:txBody>
-          <a:bodyPr rtlCol="0" anchor="ctr" lIns="0" rIns="0" tIns="0" bIns="0"/>
+          <a:bodyPr rtlCol="0" anchor="ctr"/>
           <a:lstStyle/>
           <a:p>
             <a:pPr algn="ctr"/>
-            <a:r>
-              <a:rPr sz="900" b="1">
-                <a:solidFill>
-                  <a:srgbClr val="534AB7"/>
-                </a:solidFill>
-                <a:latin typeface="Calibri"/>
-              </a:rPr>
-              <a:t>NEURODEGENERATIVE</a:t>
-            </a:r>
-          </a:p>
-        </p:txBody>
-      </p:sp>
-      <p:sp>
-        <p:nvSpPr>
-          <p:cNvPr id="3" name="TextBox 2"/>
+            <a:endParaRPr/>
+          </a:p>
+        </p:txBody>
+      </p:sp>
+      <p:sp>
+        <p:nvSpPr>
+          <p:cNvPr id="6" name="TextBox 5"/>
           <p:cNvSpPr txBox="1"/>
           <p:nvPr/>
         </p:nvSpPr>
         <p:spPr>
           <a:xfrm>
-            <a:off x="457200" y="914400"/>
-            <a:ext cx="5029200" cy="457200"/>
+            <a:off x="822960" y="890195"/>
+            <a:ext cx="10058400" cy="492443"/>
           </a:xfrm>
           <a:prstGeom prst="rect">
             <a:avLst/>
@@ -5147,34 +5947,37 @@
           <a:noFill/>
         </p:spPr>
         <p:txBody>
-          <a:bodyPr wrap="square" lIns="0" rIns="0" tIns="0" bIns="0" anchor="t">
+          <a:bodyPr wrap="square" lIns="0" tIns="0" rIns="0" bIns="0" anchor="t">
             <a:spAutoFit/>
           </a:bodyPr>
           <a:lstStyle/>
           <a:p>
-            <a:pPr algn="l"/>
-            <a:r>
-              <a:rPr sz="2200" b="0">
+            <a:r>
+              <a:rPr lang="en-GB" sz="3200" b="1" dirty="0">
                 <a:solidFill>
                   <a:srgbClr val="3D2B56"/>
                 </a:solidFill>
-                <a:latin typeface="Calibri"/>
-              </a:rPr>
-              <a:t>Alzheimer's Disease</a:t>
-            </a:r>
-          </a:p>
-        </p:txBody>
-      </p:sp>
-      <p:sp>
-        <p:nvSpPr>
-          <p:cNvPr id="4" name="TextBox 3"/>
+              </a:rPr>
+              <a:t>One recommendation</a:t>
+            </a:r>
+            <a:endParaRPr sz="3200" b="1" dirty="0">
+              <a:solidFill>
+                <a:srgbClr val="3D2B56"/>
+              </a:solidFill>
+            </a:endParaRPr>
+          </a:p>
+        </p:txBody>
+      </p:sp>
+      <p:sp>
+        <p:nvSpPr>
+          <p:cNvPr id="7" name="TextBox 6"/>
           <p:cNvSpPr txBox="1"/>
           <p:nvPr/>
         </p:nvSpPr>
         <p:spPr>
           <a:xfrm>
-            <a:off x="457200" y="1417320"/>
-            <a:ext cx="4754880" cy="868680"/>
+            <a:off x="930537" y="2027487"/>
+            <a:ext cx="10058400" cy="1292662"/>
           </a:xfrm>
           <a:prstGeom prst="rect">
             <a:avLst/>
@@ -5182,240 +5985,18 @@
           <a:noFill/>
         </p:spPr>
         <p:txBody>
-          <a:bodyPr wrap="square" lIns="0" rIns="0" tIns="0" bIns="0" anchor="t">
+          <a:bodyPr wrap="square" lIns="0" tIns="0" rIns="0" bIns="0" anchor="t">
             <a:spAutoFit/>
           </a:bodyPr>
           <a:lstStyle/>
           <a:p>
-            <a:pPr algn="l"/>
-            <a:r>
-              <a:rPr sz="1300" b="0">
+            <a:r>
+              <a:rPr sz="2800" dirty="0">
                 <a:solidFill>
                   <a:srgbClr val="6B6B6B"/>
                 </a:solidFill>
-                <a:latin typeface="Calibri"/>
-              </a:rPr>
-              <a:t>A progressive brain disease that destroys memory and thinking — the most common cause of dementia in older adults.</a:t>
-            </a:r>
-          </a:p>
-        </p:txBody>
-      </p:sp>
-      <p:sp>
-        <p:nvSpPr>
-          <p:cNvPr id="5" name="Rounded Rectangle 4"/>
-          <p:cNvSpPr/>
-          <p:nvPr/>
-        </p:nvSpPr>
-        <p:spPr>
-          <a:xfrm>
-            <a:off x="5760720" y="411480"/>
-            <a:ext cx="2926080" cy="1737360"/>
-          </a:xfrm>
-          <a:prstGeom prst="roundRect">
-            <a:avLst>
-              <a:gd name="adj" fmla="val 6000"/>
-            </a:avLst>
-          </a:prstGeom>
-          <a:solidFill>
-            <a:srgbClr val="FAEEDA"/>
-          </a:solidFill>
-          <a:ln>
-            <a:noFill/>
-          </a:ln>
-        </p:spPr>
-        <p:style>
-          <a:lnRef idx="1">
-            <a:schemeClr val="accent1"/>
-          </a:lnRef>
-          <a:fillRef idx="3">
-            <a:schemeClr val="accent1"/>
-          </a:fillRef>
-          <a:effectRef idx="2">
-            <a:schemeClr val="accent1"/>
-          </a:effectRef>
-          <a:fontRef idx="minor">
-            <a:schemeClr val="lt1"/>
-          </a:fontRef>
-        </p:style>
-        <p:txBody>
-          <a:bodyPr rtlCol="0" anchor="ctr"/>
-          <a:lstStyle/>
-          <a:p>
-            <a:pPr algn="ctr"/>
-          </a:p>
-        </p:txBody>
-      </p:sp>
-      <p:sp>
-        <p:nvSpPr>
-          <p:cNvPr id="6" name="TextBox 5"/>
-          <p:cNvSpPr txBox="1"/>
-          <p:nvPr/>
-        </p:nvSpPr>
-        <p:spPr>
-          <a:xfrm>
-            <a:off x="5760720" y="548640"/>
-            <a:ext cx="2926080" cy="228600"/>
-          </a:xfrm>
-          <a:prstGeom prst="rect">
-            <a:avLst/>
-          </a:prstGeom>
-          <a:noFill/>
-        </p:spPr>
-        <p:txBody>
-          <a:bodyPr wrap="square" lIns="0" rIns="0" tIns="0" bIns="0" anchor="t">
-            <a:spAutoFit/>
-          </a:bodyPr>
-          <a:lstStyle/>
-          <a:p>
-            <a:pPr algn="ctr"/>
-            <a:r>
-              <a:rPr sz="900" b="1">
-                <a:solidFill>
-                  <a:srgbClr val="633806"/>
-                </a:solidFill>
-                <a:latin typeface="Calibri"/>
-              </a:rPr>
-              <a:t>FEMALE-TO-MALE RATIO</a:t>
-            </a:r>
-          </a:p>
-        </p:txBody>
-      </p:sp>
-      <p:sp>
-        <p:nvSpPr>
-          <p:cNvPr id="7" name="TextBox 6"/>
-          <p:cNvSpPr txBox="1"/>
-          <p:nvPr/>
-        </p:nvSpPr>
-        <p:spPr>
-          <a:xfrm>
-            <a:off x="5760720" y="777240"/>
-            <a:ext cx="2926080" cy="731520"/>
-          </a:xfrm>
-          <a:prstGeom prst="rect">
-            <a:avLst/>
-          </a:prstGeom>
-          <a:noFill/>
-        </p:spPr>
-        <p:txBody>
-          <a:bodyPr wrap="square" lIns="0" rIns="0" tIns="0" bIns="0" anchor="t">
-            <a:spAutoFit/>
-          </a:bodyPr>
-          <a:lstStyle/>
-          <a:p>
-            <a:pPr algn="ctr"/>
-            <a:r>
-              <a:rPr sz="5200" b="1">
-                <a:solidFill>
-                  <a:srgbClr val="BA7517"/>
-                </a:solidFill>
-                <a:latin typeface="Calibri"/>
-              </a:rPr>
-              <a:t>2:1</a:t>
-            </a:r>
-          </a:p>
-        </p:txBody>
-      </p:sp>
-      <p:sp>
-        <p:nvSpPr>
-          <p:cNvPr id="8" name="TextBox 7"/>
-          <p:cNvSpPr txBox="1"/>
-          <p:nvPr/>
-        </p:nvSpPr>
-        <p:spPr>
-          <a:xfrm>
-            <a:off x="5760720" y="1508760"/>
-            <a:ext cx="2926080" cy="548640"/>
-          </a:xfrm>
-          <a:prstGeom prst="rect">
-            <a:avLst/>
-          </a:prstGeom>
-          <a:noFill/>
-        </p:spPr>
-        <p:txBody>
-          <a:bodyPr wrap="square" lIns="0" rIns="0" tIns="0" bIns="0" anchor="t">
-            <a:spAutoFit/>
-          </a:bodyPr>
-          <a:lstStyle/>
-          <a:p>
-            <a:pPr algn="ctr"/>
-            <a:r>
-              <a:rPr sz="1100" b="0">
-                <a:solidFill>
-                  <a:srgbClr val="854F0B"/>
-                </a:solidFill>
-                <a:latin typeface="Calibri"/>
-              </a:rPr>
-              <a:t>By age 45, a woman's lifetime risk of Alzheimer's is 1 in 5 — twice a man's.</a:t>
-            </a:r>
-          </a:p>
-        </p:txBody>
-      </p:sp>
-      <p:cxnSp>
-        <p:nvCxnSpPr>
-          <p:cNvPr id="9" name="Connector 8"/>
-          <p:cNvCxnSpPr/>
-          <p:nvPr/>
-        </p:nvCxnSpPr>
-        <p:spPr>
-          <a:xfrm>
-            <a:off x="457200" y="2331720"/>
-            <a:ext cx="8229600" cy="0"/>
-          </a:xfrm>
-          <a:prstGeom prst="line">
-            <a:avLst/>
-          </a:prstGeom>
-          <a:ln w="6350">
-            <a:solidFill>
-              <a:srgbClr val="E0D8F0"/>
-            </a:solidFill>
-          </a:ln>
-        </p:spPr>
-        <p:style>
-          <a:lnRef idx="2">
-            <a:schemeClr val="accent1"/>
-          </a:lnRef>
-          <a:fillRef idx="0">
-            <a:schemeClr val="accent1"/>
-          </a:fillRef>
-          <a:effectRef idx="1">
-            <a:schemeClr val="accent1"/>
-          </a:effectRef>
-          <a:fontRef idx="minor">
-            <a:schemeClr val="tx1"/>
-          </a:fontRef>
-        </p:style>
-      </p:cxnSp>
-      <p:sp>
-        <p:nvSpPr>
-          <p:cNvPr id="10" name="TextBox 9"/>
-          <p:cNvSpPr txBox="1"/>
-          <p:nvPr/>
-        </p:nvSpPr>
-        <p:spPr>
-          <a:xfrm>
-            <a:off x="457200" y="4709160"/>
-            <a:ext cx="8229600" cy="365760"/>
-          </a:xfrm>
-          <a:prstGeom prst="rect">
-            <a:avLst/>
-          </a:prstGeom>
-          <a:noFill/>
-        </p:spPr>
-        <p:txBody>
-          <a:bodyPr wrap="square" lIns="0" rIns="0" tIns="0" bIns="0">
-            <a:spAutoFit/>
-          </a:bodyPr>
-          <a:lstStyle/>
-          <a:p>
-            <a:pPr algn="l"/>
-            <a:r>
-              <a:rPr sz="900">
-                <a:solidFill>
-                  <a:srgbClr val="AAAAAA"/>
-                </a:solidFill>
-                <a:latin typeface="Calibri"/>
-              </a:rPr>
-              <a:t>[4] Alzheimer's disease as a women's health challenge (PMC, 2024) · https://pmc.ncbi.nlm.nih.gov/articles/PMC11106001/</a:t>
+              </a:rPr>
+              <a:t>Make sex-disaggregated reporting the default in every NCD surveillance round so the burden women carry stops hiding in the totals.</a:t>
             </a:r>
           </a:p>
         </p:txBody>
@@ -5428,8 +6009,8 @@
 </p:sld>
 </file>
 
-<file path=ppt/slides/slide8.xml><?xml version="1.0" encoding="utf-8"?>
-<p:sld xmlns:a="http://schemas.openxmlformats.org/drawingml/2006/main" xmlns:p="http://schemas.openxmlformats.org/presentationml/2006/main" xmlns:r="http://schemas.openxmlformats.org/officeDocument/2006/relationships">
+<file path=ppt/slides/slide9.xml><?xml version="1.0" encoding="utf-8"?>
+<p:sld xmlns:a="http://schemas.openxmlformats.org/drawingml/2006/main" xmlns:r="http://schemas.openxmlformats.org/officeDocument/2006/relationships" xmlns:p="http://schemas.openxmlformats.org/presentationml/2006/main">
   <p:cSld>
     <p:bg>
       <p:bgPr>
@@ -5445,71 +6026,24 @@
         <p:cNvGrpSpPr/>
         <p:nvPr/>
       </p:nvGrpSpPr>
-      <p:grpSpPr/>
-      <p:sp>
-        <p:nvSpPr>
-          <p:cNvPr id="2" name="Rounded Rectangle 1"/>
-          <p:cNvSpPr/>
-          <p:nvPr/>
-        </p:nvSpPr>
-        <p:spPr>
-          <a:xfrm>
-            <a:off x="457200" y="502920"/>
-            <a:ext cx="1463040" cy="256032"/>
-          </a:xfrm>
-          <a:prstGeom prst="roundRect">
-            <a:avLst>
-              <a:gd name="adj" fmla="val 50000"/>
-            </a:avLst>
-          </a:prstGeom>
-          <a:solidFill>
-            <a:srgbClr val="EEEDFE"/>
-          </a:solidFill>
-          <a:ln>
-            <a:noFill/>
-          </a:ln>
-        </p:spPr>
-        <p:style>
-          <a:lnRef idx="1">
-            <a:schemeClr val="accent1"/>
-          </a:lnRef>
-          <a:fillRef idx="3">
-            <a:schemeClr val="accent1"/>
-          </a:fillRef>
-          <a:effectRef idx="2">
-            <a:schemeClr val="accent1"/>
-          </a:effectRef>
-          <a:fontRef idx="minor">
-            <a:schemeClr val="lt1"/>
-          </a:fontRef>
-        </p:style>
-        <p:txBody>
-          <a:bodyPr rtlCol="0" anchor="ctr" lIns="0" rIns="0" tIns="0" bIns="0"/>
-          <a:lstStyle/>
-          <a:p>
-            <a:pPr algn="ctr"/>
-            <a:r>
-              <a:rPr sz="900" b="1">
-                <a:solidFill>
-                  <a:srgbClr val="534AB7"/>
-                </a:solidFill>
-                <a:latin typeface="Calibri"/>
-              </a:rPr>
-              <a:t>MENTAL HEALTH</a:t>
-            </a:r>
-          </a:p>
-        </p:txBody>
-      </p:sp>
-      <p:sp>
-        <p:nvSpPr>
-          <p:cNvPr id="3" name="TextBox 2"/>
+      <p:grpSpPr>
+        <a:xfrm>
+          <a:off x="0" y="0"/>
+          <a:ext cx="0" cy="0"/>
+          <a:chOff x="0" y="0"/>
+          <a:chExt cx="0" cy="0"/>
+        </a:xfrm>
+      </p:grpSpPr>
+      <p:sp>
+        <p:nvSpPr>
+          <p:cNvPr id="2" name="TextBox 1"/>
           <p:cNvSpPr txBox="1"/>
           <p:nvPr/>
         </p:nvSpPr>
         <p:spPr>
           <a:xfrm>
-            <a:off x="457200" y="914400"/>
-            <a:ext cx="5029200" cy="457200"/>
+            <a:off x="822960" y="457200"/>
+            <a:ext cx="10515600" cy="548640"/>
           </a:xfrm>
           <a:prstGeom prst="rect">
             <a:avLst/>
@@ -5517,34 +6051,34 @@
           <a:noFill/>
         </p:spPr>
         <p:txBody>
-          <a:bodyPr wrap="square" lIns="0" rIns="0" tIns="0" bIns="0" anchor="t">
+          <a:bodyPr wrap="square" lIns="0" tIns="0" rIns="0" bIns="0" anchor="t">
             <a:spAutoFit/>
           </a:bodyPr>
           <a:lstStyle/>
           <a:p>
             <a:pPr algn="l"/>
             <a:r>
-              <a:rPr sz="2200" b="0">
+              <a:rPr sz="2600" b="1">
                 <a:solidFill>
                   <a:srgbClr val="3D2B56"/>
                 </a:solidFill>
                 <a:latin typeface="Calibri"/>
               </a:rPr>
-              <a:t>Major Depression</a:t>
-            </a:r>
-          </a:p>
-        </p:txBody>
-      </p:sp>
-      <p:sp>
-        <p:nvSpPr>
-          <p:cNvPr id="4" name="TextBox 3"/>
+              <a:t>Sources</a:t>
+            </a:r>
+          </a:p>
+        </p:txBody>
+      </p:sp>
+      <p:sp>
+        <p:nvSpPr>
+          <p:cNvPr id="3" name="TextBox 2"/>
           <p:cNvSpPr txBox="1"/>
           <p:nvPr/>
         </p:nvSpPr>
         <p:spPr>
           <a:xfrm>
-            <a:off x="457200" y="1417320"/>
-            <a:ext cx="4754880" cy="868680"/>
+            <a:off x="822960" y="1188720"/>
+            <a:ext cx="10515600" cy="5029200"/>
           </a:xfrm>
           <a:prstGeom prst="rect">
             <a:avLst/>
@@ -5552,79 +6086,235 @@
           <a:noFill/>
         </p:spPr>
         <p:txBody>
-          <a:bodyPr wrap="square" lIns="0" rIns="0" tIns="0" bIns="0" anchor="t">
+          <a:bodyPr wrap="square" lIns="0" rIns="0">
             <a:spAutoFit/>
           </a:bodyPr>
           <a:lstStyle/>
           <a:p>
-            <a:pPr algn="l"/>
-            <a:r>
-              <a:rPr sz="1300" b="0">
-                <a:solidFill>
-                  <a:srgbClr val="6B6B6B"/>
+            <a:pPr algn="l">
+              <a:spcAft>
+                <a:spcPts val="800"/>
+              </a:spcAft>
+            </a:pPr>
+            <a:r>
+              <a:rPr sz="1200" b="1" dirty="0">
+                <a:solidFill>
+                  <a:srgbClr val="3D2B56"/>
                 </a:solidFill>
                 <a:latin typeface="Calibri"/>
               </a:rPr>
-              <a:t>A persistent mood disorder that affects how a person feels, thinks and handles daily life — far more than just sadness.</a:t>
-            </a:r>
-          </a:p>
-        </p:txBody>
-      </p:sp>
-      <p:sp>
-        <p:nvSpPr>
-          <p:cNvPr id="5" name="Rounded Rectangle 4"/>
-          <p:cNvSpPr/>
-          <p:nvPr/>
-        </p:nvSpPr>
-        <p:spPr>
-          <a:xfrm>
-            <a:off x="5760720" y="411480"/>
-            <a:ext cx="2926080" cy="1737360"/>
-          </a:xfrm>
-          <a:prstGeom prst="roundRect">
-            <a:avLst>
-              <a:gd name="adj" fmla="val 6000"/>
-            </a:avLst>
-          </a:prstGeom>
-          <a:solidFill>
-            <a:srgbClr val="FAEEDA"/>
-          </a:solidFill>
-          <a:ln>
-            <a:noFill/>
-          </a:ln>
-        </p:spPr>
-        <p:style>
-          <a:lnRef idx="1">
-            <a:schemeClr val="accent1"/>
-          </a:lnRef>
-          <a:fillRef idx="3">
-            <a:schemeClr val="accent1"/>
-          </a:fillRef>
-          <a:effectRef idx="2">
-            <a:schemeClr val="accent1"/>
-          </a:effectRef>
-          <a:fontRef idx="minor">
-            <a:schemeClr val="lt1"/>
-          </a:fontRef>
-        </p:style>
-        <p:txBody>
-          <a:bodyPr rtlCol="0" anchor="ctr"/>
-          <a:lstStyle/>
-          <a:p>
-            <a:pPr algn="ctr"/>
-          </a:p>
-        </p:txBody>
-      </p:sp>
-      <p:sp>
-        <p:nvSpPr>
-          <p:cNvPr id="6" name="TextBox 5"/>
+              <a:t>[1] Systemic Lupus Erythematosus (Lupus) — </a:t>
+            </a:r>
+            <a:r>
+              <a:rPr sz="1100" dirty="0">
+                <a:solidFill>
+                  <a:srgbClr val="2C2C2C"/>
+                </a:solidFill>
+                <a:latin typeface="Calibri"/>
+              </a:rPr>
+              <a:t>Sex- and gender-related differences in systemic lupus erythematosus: a scoping review (PMC, 2024).  https://pmc.ncbi.nlm.nih.gov/articles/PMC12204902/</a:t>
+            </a:r>
+          </a:p>
+          <a:p>
+            <a:pPr algn="l">
+              <a:spcAft>
+                <a:spcPts val="800"/>
+              </a:spcAft>
+            </a:pPr>
+            <a:r>
+              <a:rPr sz="1200" b="1" dirty="0">
+                <a:solidFill>
+                  <a:srgbClr val="3D2B56"/>
+                </a:solidFill>
+                <a:latin typeface="Calibri"/>
+              </a:rPr>
+              <a:t>[2] Osteoporosis — </a:t>
+            </a:r>
+            <a:r>
+              <a:rPr sz="1100" dirty="0" err="1">
+                <a:solidFill>
+                  <a:srgbClr val="2C2C2C"/>
+                </a:solidFill>
+                <a:latin typeface="Calibri"/>
+              </a:rPr>
+              <a:t>Sarafrazi</a:t>
+            </a:r>
+            <a:r>
+              <a:rPr sz="1100" dirty="0">
+                <a:solidFill>
+                  <a:srgbClr val="2C2C2C"/>
+                </a:solidFill>
+                <a:latin typeface="Calibri"/>
+              </a:rPr>
+              <a:t> N, </a:t>
+            </a:r>
+            <a:r>
+              <a:rPr sz="1100" dirty="0" err="1">
+                <a:solidFill>
+                  <a:srgbClr val="2C2C2C"/>
+                </a:solidFill>
+                <a:latin typeface="Calibri"/>
+              </a:rPr>
+              <a:t>Wambogo</a:t>
+            </a:r>
+            <a:r>
+              <a:rPr sz="1100" dirty="0">
+                <a:solidFill>
+                  <a:srgbClr val="2C2C2C"/>
+                </a:solidFill>
+                <a:latin typeface="Calibri"/>
+              </a:rPr>
+              <a:t> EA, Shepherd JA. Osteoporosis or Low Bone Mass in Older Adults, United States, 2017-2018. CDC NCHS Data Brief No. 405, 2021.  https://www.cdc.gov/nchs/products/databriefs/db405.htm</a:t>
+            </a:r>
+          </a:p>
+          <a:p>
+            <a:pPr algn="l">
+              <a:spcAft>
+                <a:spcPts val="800"/>
+              </a:spcAft>
+            </a:pPr>
+            <a:r>
+              <a:rPr sz="1200" b="1" dirty="0">
+                <a:solidFill>
+                  <a:srgbClr val="3D2B56"/>
+                </a:solidFill>
+                <a:latin typeface="Calibri"/>
+              </a:rPr>
+              <a:t>[3] Migraine — </a:t>
+            </a:r>
+            <a:r>
+              <a:rPr sz="1100" dirty="0" err="1">
+                <a:solidFill>
+                  <a:srgbClr val="2C2C2C"/>
+                </a:solidFill>
+                <a:latin typeface="Calibri"/>
+              </a:rPr>
+              <a:t>Buse</a:t>
+            </a:r>
+            <a:r>
+              <a:rPr sz="1100" dirty="0">
+                <a:solidFill>
+                  <a:srgbClr val="2C2C2C"/>
+                </a:solidFill>
+                <a:latin typeface="Calibri"/>
+              </a:rPr>
+              <a:t> DC et al. Sex differences in the prevalence, symptoms, and associated features of migraine — AMPP Study. PubMed, 2013.  https://pubmed.ncbi.nlm.nih.gov/23808666/</a:t>
+            </a:r>
+          </a:p>
+          <a:p>
+            <a:pPr algn="l">
+              <a:spcAft>
+                <a:spcPts val="800"/>
+              </a:spcAft>
+            </a:pPr>
+            <a:r>
+              <a:rPr sz="1200" b="1" dirty="0">
+                <a:solidFill>
+                  <a:srgbClr val="3D2B56"/>
+                </a:solidFill>
+                <a:latin typeface="Calibri"/>
+              </a:rPr>
+              <a:t>[4] Alzheimer's Disease — </a:t>
+            </a:r>
+            <a:r>
+              <a:rPr sz="1100" dirty="0">
+                <a:solidFill>
+                  <a:srgbClr val="2C2C2C"/>
+                </a:solidFill>
+                <a:latin typeface="Calibri"/>
+              </a:rPr>
+              <a:t>Alzheimer's disease as a women's health challenge (PMC, 2024).  https://pmc.ncbi.nlm.nih.gov/articles/PMC11106001/</a:t>
+            </a:r>
+          </a:p>
+          <a:p>
+            <a:pPr algn="l">
+              <a:spcAft>
+                <a:spcPts val="800"/>
+              </a:spcAft>
+            </a:pPr>
+            <a:r>
+              <a:rPr sz="1200" b="1" dirty="0">
+                <a:solidFill>
+                  <a:srgbClr val="3D2B56"/>
+                </a:solidFill>
+                <a:latin typeface="Calibri"/>
+              </a:rPr>
+              <a:t>[5] Major Depression — </a:t>
+            </a:r>
+            <a:r>
+              <a:rPr sz="1100" dirty="0">
+                <a:solidFill>
+                  <a:srgbClr val="2C2C2C"/>
+                </a:solidFill>
+                <a:latin typeface="Calibri"/>
+              </a:rPr>
+              <a:t>Albert PR. Why is depression more prevalent in women? Journal of Psychiatry &amp; Neuroscience. PMC, 2015.  https://pmc.ncbi.nlm.nih.gov/articles/PMC4478054/</a:t>
+            </a:r>
+          </a:p>
+          <a:p>
+            <a:pPr algn="l">
+              <a:spcAft>
+                <a:spcPts val="800"/>
+              </a:spcAft>
+            </a:pPr>
+            <a:r>
+              <a:rPr sz="1200" b="1" dirty="0">
+                <a:solidFill>
+                  <a:srgbClr val="3D2B56"/>
+                </a:solidFill>
+                <a:latin typeface="Calibri"/>
+              </a:rPr>
+              <a:t>[H] Hook — Zambia STEPS 2017 — </a:t>
+            </a:r>
+            <a:r>
+              <a:rPr sz="1100" dirty="0" err="1">
+                <a:solidFill>
+                  <a:srgbClr val="2C2C2C"/>
+                </a:solidFill>
+                <a:latin typeface="Calibri"/>
+              </a:rPr>
+              <a:t>Pengpid</a:t>
+            </a:r>
+            <a:r>
+              <a:rPr sz="1100" dirty="0">
+                <a:solidFill>
+                  <a:srgbClr val="2C2C2C"/>
+                </a:solidFill>
+                <a:latin typeface="Calibri"/>
+              </a:rPr>
+              <a:t> S, </a:t>
+            </a:r>
+            <a:r>
+              <a:rPr sz="1100" dirty="0" err="1">
+                <a:solidFill>
+                  <a:srgbClr val="2C2C2C"/>
+                </a:solidFill>
+                <a:latin typeface="Calibri"/>
+              </a:rPr>
+              <a:t>Peltzer</a:t>
+            </a:r>
+            <a:r>
+              <a:rPr sz="1100" dirty="0">
+                <a:solidFill>
+                  <a:srgbClr val="2C2C2C"/>
+                </a:solidFill>
+                <a:latin typeface="Calibri"/>
+              </a:rPr>
+              <a:t> K. Prevalence and correlates of multiple non-communicable disease risk factors among adults in Zambia: results of the first national STEPS survey in 2017. PMC, 2021.  https://www.ncbi.nlm.nih.gov/pmc/articles/PMC7864270/</a:t>
+            </a:r>
+          </a:p>
+        </p:txBody>
+      </p:sp>
+      <p:sp>
+        <p:nvSpPr>
+          <p:cNvPr id="4" name="TextBox 3"/>
           <p:cNvSpPr txBox="1"/>
           <p:nvPr/>
         </p:nvSpPr>
         <p:spPr>
           <a:xfrm>
-            <a:off x="5760720" y="548640"/>
-            <a:ext cx="2926080" cy="228600"/>
+            <a:off x="457200" y="6446520"/>
+            <a:ext cx="10424160" cy="320040"/>
           </a:xfrm>
           <a:prstGeom prst="rect">
             <a:avLst/>
@@ -5632,406 +6322,20 @@
           <a:noFill/>
         </p:spPr>
         <p:txBody>
-          <a:bodyPr wrap="square" lIns="0" rIns="0" tIns="0" bIns="0" anchor="t">
+          <a:bodyPr wrap="square" lIns="0" tIns="0" rIns="0" bIns="0" anchor="t">
             <a:spAutoFit/>
           </a:bodyPr>
           <a:lstStyle/>
           <a:p>
-            <a:pPr algn="ctr"/>
-            <a:r>
-              <a:rPr sz="900" b="1">
-                <a:solidFill>
-                  <a:srgbClr val="633806"/>
+            <a:pPr algn="l"/>
+            <a:r>
+              <a:rPr sz="900" b="0">
+                <a:solidFill>
+                  <a:srgbClr val="888888"/>
                 </a:solidFill>
                 <a:latin typeface="Calibri"/>
               </a:rPr>
-              <a:t>FEMALE-TO-MALE RATIO</a:t>
-            </a:r>
-          </a:p>
-        </p:txBody>
-      </p:sp>
-      <p:sp>
-        <p:nvSpPr>
-          <p:cNvPr id="7" name="TextBox 6"/>
-          <p:cNvSpPr txBox="1"/>
-          <p:nvPr/>
-        </p:nvSpPr>
-        <p:spPr>
-          <a:xfrm>
-            <a:off x="5760720" y="777240"/>
-            <a:ext cx="2926080" cy="731520"/>
-          </a:xfrm>
-          <a:prstGeom prst="rect">
-            <a:avLst/>
-          </a:prstGeom>
-          <a:noFill/>
-        </p:spPr>
-        <p:txBody>
-          <a:bodyPr wrap="square" lIns="0" rIns="0" tIns="0" bIns="0" anchor="t">
-            <a:spAutoFit/>
-          </a:bodyPr>
-          <a:lstStyle/>
-          <a:p>
-            <a:pPr algn="ctr"/>
-            <a:r>
-              <a:rPr sz="5200" b="1">
-                <a:solidFill>
-                  <a:srgbClr val="BA7517"/>
-                </a:solidFill>
-                <a:latin typeface="Calibri"/>
-              </a:rPr>
-              <a:t>2:1</a:t>
-            </a:r>
-          </a:p>
-        </p:txBody>
-      </p:sp>
-      <p:sp>
-        <p:nvSpPr>
-          <p:cNvPr id="8" name="TextBox 7"/>
-          <p:cNvSpPr txBox="1"/>
-          <p:nvPr/>
-        </p:nvSpPr>
-        <p:spPr>
-          <a:xfrm>
-            <a:off x="5760720" y="1508760"/>
-            <a:ext cx="2926080" cy="548640"/>
-          </a:xfrm>
-          <a:prstGeom prst="rect">
-            <a:avLst/>
-          </a:prstGeom>
-          <a:noFill/>
-        </p:spPr>
-        <p:txBody>
-          <a:bodyPr wrap="square" lIns="0" rIns="0" tIns="0" bIns="0" anchor="t">
-            <a:spAutoFit/>
-          </a:bodyPr>
-          <a:lstStyle/>
-          <a:p>
-            <a:pPr algn="ctr"/>
-            <a:r>
-              <a:rPr sz="1100" b="0">
-                <a:solidFill>
-                  <a:srgbClr val="854F0B"/>
-                </a:solidFill>
-                <a:latin typeface="Calibri"/>
-              </a:rPr>
-              <a:t>Twice as many women as men live with depression — in nearly every country measured.</a:t>
-            </a:r>
-          </a:p>
-        </p:txBody>
-      </p:sp>
-      <p:cxnSp>
-        <p:nvCxnSpPr>
-          <p:cNvPr id="9" name="Connector 8"/>
-          <p:cNvCxnSpPr/>
-          <p:nvPr/>
-        </p:nvCxnSpPr>
-        <p:spPr>
-          <a:xfrm>
-            <a:off x="457200" y="2331720"/>
-            <a:ext cx="8229600" cy="0"/>
-          </a:xfrm>
-          <a:prstGeom prst="line">
-            <a:avLst/>
-          </a:prstGeom>
-          <a:ln w="6350">
-            <a:solidFill>
-              <a:srgbClr val="E0D8F0"/>
-            </a:solidFill>
-          </a:ln>
-        </p:spPr>
-        <p:style>
-          <a:lnRef idx="2">
-            <a:schemeClr val="accent1"/>
-          </a:lnRef>
-          <a:fillRef idx="0">
-            <a:schemeClr val="accent1"/>
-          </a:fillRef>
-          <a:effectRef idx="1">
-            <a:schemeClr val="accent1"/>
-          </a:effectRef>
-          <a:fontRef idx="minor">
-            <a:schemeClr val="tx1"/>
-          </a:fontRef>
-        </p:style>
-      </p:cxnSp>
-      <p:sp>
-        <p:nvSpPr>
-          <p:cNvPr id="10" name="TextBox 9"/>
-          <p:cNvSpPr txBox="1"/>
-          <p:nvPr/>
-        </p:nvSpPr>
-        <p:spPr>
-          <a:xfrm>
-            <a:off x="457200" y="4709160"/>
-            <a:ext cx="8229600" cy="365760"/>
-          </a:xfrm>
-          <a:prstGeom prst="rect">
-            <a:avLst/>
-          </a:prstGeom>
-          <a:noFill/>
-        </p:spPr>
-        <p:txBody>
-          <a:bodyPr wrap="square" lIns="0" rIns="0" tIns="0" bIns="0">
-            <a:spAutoFit/>
-          </a:bodyPr>
-          <a:lstStyle/>
-          <a:p>
-            <a:pPr algn="l"/>
-            <a:r>
-              <a:rPr sz="900">
-                <a:solidFill>
-                  <a:srgbClr val="AAAAAA"/>
-                </a:solidFill>
-                <a:latin typeface="Calibri"/>
-              </a:rPr>
-              <a:t>[5] Albert PR. Why is depression more prevalent in women? Journal of Psychiatry &amp; Neuroscience. PMC, 2015 · https://pmc.ncbi.nlm.nih.gov/articles/PMC4478054/</a:t>
-            </a:r>
-          </a:p>
-        </p:txBody>
-      </p:sp>
-    </p:spTree>
-  </p:cSld>
-  <p:clrMapOvr>
-    <a:masterClrMapping/>
-  </p:clrMapOvr>
-</p:sld>
-</file>
-
-<file path=ppt/slides/slide9.xml><?xml version="1.0" encoding="utf-8"?>
-<p:sld xmlns:a="http://schemas.openxmlformats.org/drawingml/2006/main" xmlns:p="http://schemas.openxmlformats.org/presentationml/2006/main" xmlns:r="http://schemas.openxmlformats.org/officeDocument/2006/relationships">
-  <p:cSld>
-    <p:bg>
-      <p:bgPr>
-        <a:solidFill>
-          <a:srgbClr val="FFF8F5"/>
-        </a:solidFill>
-        <a:effectLst/>
-      </p:bgPr>
-    </p:bg>
-    <p:spTree>
-      <p:nvGrpSpPr>
-        <p:cNvPr id="1" name=""/>
-        <p:cNvGrpSpPr/>
-        <p:nvPr/>
-      </p:nvGrpSpPr>
-      <p:grpSpPr/>
-      <p:sp>
-        <p:nvSpPr>
-          <p:cNvPr id="2" name="TextBox 1"/>
-          <p:cNvSpPr txBox="1"/>
-          <p:nvPr/>
-        </p:nvSpPr>
-        <p:spPr>
-          <a:xfrm>
-            <a:off x="822960" y="640080"/>
-            <a:ext cx="10515600" cy="365760"/>
-          </a:xfrm>
-          <a:prstGeom prst="rect">
-            <a:avLst/>
-          </a:prstGeom>
-          <a:noFill/>
-        </p:spPr>
-        <p:txBody>
-          <a:bodyPr wrap="square" lIns="0" rIns="0" tIns="0" bIns="0" anchor="t">
-            <a:spAutoFit/>
-          </a:bodyPr>
-          <a:lstStyle/>
-          <a:p>
-            <a:pPr algn="l"/>
-            <a:r>
-              <a:rPr sz="1200" b="1">
-                <a:solidFill>
-                  <a:srgbClr val="7B5EA7"/>
-                </a:solidFill>
-                <a:latin typeface="Calibri"/>
-              </a:rPr>
-              <a:t>THE SO-WHAT</a:t>
-            </a:r>
-          </a:p>
-        </p:txBody>
-      </p:sp>
-      <p:sp>
-        <p:nvSpPr>
-          <p:cNvPr id="3" name="TextBox 2"/>
-          <p:cNvSpPr txBox="1"/>
-          <p:nvPr/>
-        </p:nvSpPr>
-        <p:spPr>
-          <a:xfrm>
-            <a:off x="822960" y="1097280"/>
-            <a:ext cx="548640" cy="365760"/>
-          </a:xfrm>
-          <a:prstGeom prst="rect">
-            <a:avLst/>
-          </a:prstGeom>
-          <a:noFill/>
-        </p:spPr>
-        <p:txBody>
-          <a:bodyPr wrap="square" lIns="0" rIns="0" tIns="0" bIns="0" anchor="t">
-            <a:spAutoFit/>
-          </a:bodyPr>
-          <a:lstStyle/>
-          <a:p>
-            <a:pPr algn="l"/>
-            <a:r>
-              <a:rPr sz="1100" b="1">
-                <a:solidFill>
-                  <a:srgbClr val="E8A838"/>
-                </a:solidFill>
-                <a:latin typeface="Calibri"/>
-              </a:rPr>
-              <a:t>Big Idea</a:t>
-            </a:r>
-          </a:p>
-        </p:txBody>
-      </p:sp>
-      <p:sp>
-        <p:nvSpPr>
-          <p:cNvPr id="4" name="TextBox 3"/>
-          <p:cNvSpPr txBox="1"/>
-          <p:nvPr/>
-        </p:nvSpPr>
-        <p:spPr>
-          <a:xfrm>
-            <a:off x="822960" y="1554480"/>
-            <a:ext cx="10515600" cy="2743200"/>
-          </a:xfrm>
-          <a:prstGeom prst="rect">
-            <a:avLst/>
-          </a:prstGeom>
-          <a:noFill/>
-        </p:spPr>
-        <p:txBody>
-          <a:bodyPr wrap="square" lIns="0" rIns="0" tIns="0" bIns="0" anchor="t">
-            <a:spAutoFit/>
-          </a:bodyPr>
-          <a:lstStyle/>
-          <a:p>
-            <a:pPr algn="l"/>
-            <a:r>
-              <a:rPr sz="2600" b="1">
-                <a:solidFill>
-                  <a:srgbClr val="3D2B56"/>
-                </a:solidFill>
-                <a:latin typeface="Calibri"/>
-              </a:rPr>
-              <a:t>The same female-skewed health burden that shows up in Zambia's diabetes numbers runs through five of the most disabling diseases of modern life — and the world still designs medicine, research and screening as if it didn't.</a:t>
-            </a:r>
-          </a:p>
-        </p:txBody>
-      </p:sp>
-      <p:sp>
-        <p:nvSpPr>
-          <p:cNvPr id="5" name="Rounded Rectangle 4"/>
-          <p:cNvSpPr/>
-          <p:nvPr/>
-        </p:nvSpPr>
-        <p:spPr>
-          <a:xfrm>
-            <a:off x="822960" y="4754880"/>
-            <a:ext cx="10515600" cy="1463040"/>
-          </a:xfrm>
-          <a:prstGeom prst="roundRect">
-            <a:avLst>
-              <a:gd name="adj" fmla="val 6000"/>
-            </a:avLst>
-          </a:prstGeom>
-          <a:solidFill>
-            <a:srgbClr val="F3EEF8"/>
-          </a:solidFill>
-          <a:ln>
-            <a:noFill/>
-          </a:ln>
-        </p:spPr>
-        <p:style>
-          <a:lnRef idx="1">
-            <a:schemeClr val="accent1"/>
-          </a:lnRef>
-          <a:fillRef idx="3">
-            <a:schemeClr val="accent1"/>
-          </a:fillRef>
-          <a:effectRef idx="2">
-            <a:schemeClr val="accent1"/>
-          </a:effectRef>
-          <a:fontRef idx="minor">
-            <a:schemeClr val="lt1"/>
-          </a:fontRef>
-        </p:style>
-        <p:txBody>
-          <a:bodyPr rtlCol="0" anchor="ctr"/>
-          <a:lstStyle/>
-          <a:p>
-            <a:pPr algn="ctr"/>
-          </a:p>
-        </p:txBody>
-      </p:sp>
-      <p:sp>
-        <p:nvSpPr>
-          <p:cNvPr id="6" name="TextBox 5"/>
-          <p:cNvSpPr txBox="1"/>
-          <p:nvPr/>
-        </p:nvSpPr>
-        <p:spPr>
-          <a:xfrm>
-            <a:off x="1097280" y="4937760"/>
-            <a:ext cx="10058400" cy="365760"/>
-          </a:xfrm>
-          <a:prstGeom prst="rect">
-            <a:avLst/>
-          </a:prstGeom>
-          <a:noFill/>
-        </p:spPr>
-        <p:txBody>
-          <a:bodyPr wrap="square" lIns="0" rIns="0" tIns="0" bIns="0" anchor="t">
-            <a:spAutoFit/>
-          </a:bodyPr>
-          <a:lstStyle/>
-          <a:p>
-            <a:pPr algn="l"/>
-            <a:r>
-              <a:rPr sz="1100" b="1">
-                <a:solidFill>
-                  <a:srgbClr val="E8A838"/>
-                </a:solidFill>
-                <a:latin typeface="Calibri"/>
-              </a:rPr>
-              <a:t>ONE RECOMMENDATION</a:t>
-            </a:r>
-          </a:p>
-        </p:txBody>
-      </p:sp>
-      <p:sp>
-        <p:nvSpPr>
-          <p:cNvPr id="7" name="TextBox 6"/>
-          <p:cNvSpPr txBox="1"/>
-          <p:nvPr/>
-        </p:nvSpPr>
-        <p:spPr>
-          <a:xfrm>
-            <a:off x="1097280" y="5349240"/>
-            <a:ext cx="10058400" cy="914400"/>
-          </a:xfrm>
-          <a:prstGeom prst="rect">
-            <a:avLst/>
-          </a:prstGeom>
-          <a:noFill/>
-        </p:spPr>
-        <p:txBody>
-          <a:bodyPr wrap="square" lIns="0" rIns="0" tIns="0" bIns="0" anchor="t">
-            <a:spAutoFit/>
-          </a:bodyPr>
-          <a:lstStyle/>
-          <a:p>
-            <a:pPr algn="l"/>
-            <a:r>
-              <a:rPr sz="1800" b="0">
-                <a:solidFill>
-                  <a:srgbClr val="2C2C2C"/>
-                </a:solidFill>
-                <a:latin typeface="Calibri"/>
-              </a:rPr>
-              <a:t>Make sex-disaggregated reporting the default in every NCD surveillance round — starting with Zambia's next STEPS — so the burden women carry stops hiding in the totals.</a:t>
+              <a:t>All sources accessed via PubMed Central, CDC NCHS, and peer-reviewed journals.</a:t>
             </a:r>
           </a:p>
         </p:txBody>
@@ -6362,4 +6666,265 @@
   </a:objectDefaults>
   <a:extraClrSchemeLst/>
 </a:theme>
+</file>
+
+<file path=ppt/theme/theme2.xml><?xml version="1.0" encoding="utf-8"?>
+<a:theme xmlns:a="http://schemas.openxmlformats.org/drawingml/2006/main" name="Office Theme">
+  <a:themeElements>
+    <a:clrScheme name="Office">
+      <a:dk1>
+        <a:sysClr val="windowText" lastClr="000000"/>
+      </a:dk1>
+      <a:lt1>
+        <a:sysClr val="window" lastClr="FFFFFF"/>
+      </a:lt1>
+      <a:dk2>
+        <a:srgbClr val="44546A"/>
+      </a:dk2>
+      <a:lt2>
+        <a:srgbClr val="E7E6E6"/>
+      </a:lt2>
+      <a:accent1>
+        <a:srgbClr val="5B9BD5"/>
+      </a:accent1>
+      <a:accent2>
+        <a:srgbClr val="ED7D31"/>
+      </a:accent2>
+      <a:accent3>
+        <a:srgbClr val="A5A5A5"/>
+      </a:accent3>
+      <a:accent4>
+        <a:srgbClr val="FFC000"/>
+      </a:accent4>
+      <a:accent5>
+        <a:srgbClr val="4472C4"/>
+      </a:accent5>
+      <a:accent6>
+        <a:srgbClr val="70AD47"/>
+      </a:accent6>
+      <a:hlink>
+        <a:srgbClr val="0563C1"/>
+      </a:hlink>
+      <a:folHlink>
+        <a:srgbClr val="954F72"/>
+      </a:folHlink>
+    </a:clrScheme>
+    <a:fontScheme name="Office">
+      <a:majorFont>
+        <a:latin typeface="Calibri Light" panose="020F0302020204030204"/>
+        <a:ea typeface=""/>
+        <a:cs typeface=""/>
+        <a:font script="Jpan" typeface="ＭＳ Ｐゴシック"/>
+        <a:font script="Hang" typeface="맑은 고딕"/>
+        <a:font script="Hans" typeface="宋体"/>
+        <a:font script="Hant" typeface="新細明體"/>
+        <a:font script="Arab" typeface="Times New Roman"/>
+        <a:font script="Hebr" typeface="Times New Roman"/>
+        <a:font script="Thai" typeface="Angsana New"/>
+        <a:font script="Ethi" typeface="Nyala"/>
+        <a:font script="Beng" typeface="Vrinda"/>
+        <a:font script="Gujr" typeface="Shruti"/>
+        <a:font script="Khmr" typeface="MoolBoran"/>
+        <a:font script="Knda" typeface="Tunga"/>
+        <a:font script="Guru" typeface="Raavi"/>
+        <a:font script="Cans" typeface="Euphemia"/>
+        <a:font script="Cher" typeface="Plantagenet Cherokee"/>
+        <a:font script="Yiii" typeface="Microsoft Yi Baiti"/>
+        <a:font script="Tibt" typeface="Microsoft Himalaya"/>
+        <a:font script="Thaa" typeface="MV Boli"/>
+        <a:font script="Deva" typeface="Mangal"/>
+        <a:font script="Telu" typeface="Gautami"/>
+        <a:font script="Taml" typeface="Latha"/>
+        <a:font script="Syrc" typeface="Estrangelo Edessa"/>
+        <a:font script="Orya" typeface="Kalinga"/>
+        <a:font script="Mlym" typeface="Kartika"/>
+        <a:font script="Laoo" typeface="DokChampa"/>
+        <a:font script="Sinh" typeface="Iskoola Pota"/>
+        <a:font script="Mong" typeface="Mongolian Baiti"/>
+        <a:font script="Viet" typeface="Times New Roman"/>
+        <a:font script="Uigh" typeface="Microsoft Uighur"/>
+        <a:font script="Geor" typeface="Sylfaen"/>
+      </a:majorFont>
+      <a:minorFont>
+        <a:latin typeface="Calibri" panose="020F0502020204030204"/>
+        <a:ea typeface=""/>
+        <a:cs typeface=""/>
+        <a:font script="Jpan" typeface="ＭＳ Ｐゴシック"/>
+        <a:font script="Hang" typeface="맑은 고딕"/>
+        <a:font script="Hans" typeface="宋体"/>
+        <a:font script="Hant" typeface="新細明體"/>
+        <a:font script="Arab" typeface="Arial"/>
+        <a:font script="Hebr" typeface="Arial"/>
+        <a:font script="Thai" typeface="Cordia New"/>
+        <a:font script="Ethi" typeface="Nyala"/>
+        <a:font script="Beng" typeface="Vrinda"/>
+        <a:font script="Gujr" typeface="Shruti"/>
+        <a:font script="Khmr" typeface="DaunPenh"/>
+        <a:font script="Knda" typeface="Tunga"/>
+        <a:font script="Guru" typeface="Raavi"/>
+        <a:font script="Cans" typeface="Euphemia"/>
+        <a:font script="Cher" typeface="Plantagenet Cherokee"/>
+        <a:font script="Yiii" typeface="Microsoft Yi Baiti"/>
+        <a:font script="Tibt" typeface="Microsoft Himalaya"/>
+        <a:font script="Thaa" typeface="MV Boli"/>
+        <a:font script="Deva" typeface="Mangal"/>
+        <a:font script="Telu" typeface="Gautami"/>
+        <a:font script="Taml" typeface="Latha"/>
+        <a:font script="Syrc" typeface="Estrangelo Edessa"/>
+        <a:font script="Orya" typeface="Kalinga"/>
+        <a:font script="Mlym" typeface="Kartika"/>
+        <a:font script="Laoo" typeface="DokChampa"/>
+        <a:font script="Sinh" typeface="Iskoola Pota"/>
+        <a:font script="Mong" typeface="Mongolian Baiti"/>
+        <a:font script="Viet" typeface="Arial"/>
+        <a:font script="Uigh" typeface="Microsoft Uighur"/>
+        <a:font script="Geor" typeface="Sylfaen"/>
+      </a:minorFont>
+    </a:fontScheme>
+    <a:fmtScheme name="Office">
+      <a:fillStyleLst>
+        <a:solidFill>
+          <a:schemeClr val="phClr"/>
+        </a:solidFill>
+        <a:gradFill rotWithShape="1">
+          <a:gsLst>
+            <a:gs pos="0">
+              <a:schemeClr val="phClr">
+                <a:lumMod val="110000"/>
+                <a:satMod val="105000"/>
+                <a:tint val="67000"/>
+              </a:schemeClr>
+            </a:gs>
+            <a:gs pos="50000">
+              <a:schemeClr val="phClr">
+                <a:lumMod val="105000"/>
+                <a:satMod val="103000"/>
+                <a:tint val="73000"/>
+              </a:schemeClr>
+            </a:gs>
+            <a:gs pos="100000">
+              <a:schemeClr val="phClr">
+                <a:lumMod val="105000"/>
+                <a:satMod val="109000"/>
+                <a:tint val="81000"/>
+              </a:schemeClr>
+            </a:gs>
+          </a:gsLst>
+          <a:lin ang="5400000" scaled="0"/>
+        </a:gradFill>
+        <a:gradFill rotWithShape="1">
+          <a:gsLst>
+            <a:gs pos="0">
+              <a:schemeClr val="phClr">
+                <a:satMod val="103000"/>
+                <a:lumMod val="102000"/>
+                <a:tint val="94000"/>
+              </a:schemeClr>
+            </a:gs>
+            <a:gs pos="50000">
+              <a:schemeClr val="phClr">
+                <a:satMod val="110000"/>
+                <a:lumMod val="100000"/>
+                <a:shade val="100000"/>
+              </a:schemeClr>
+            </a:gs>
+            <a:gs pos="100000">
+              <a:schemeClr val="phClr">
+                <a:lumMod val="99000"/>
+                <a:satMod val="120000"/>
+                <a:shade val="78000"/>
+              </a:schemeClr>
+            </a:gs>
+          </a:gsLst>
+          <a:lin ang="5400000" scaled="0"/>
+        </a:gradFill>
+      </a:fillStyleLst>
+      <a:lnStyleLst>
+        <a:ln w="6350" cap="flat" cmpd="sng" algn="ctr">
+          <a:solidFill>
+            <a:schemeClr val="phClr"/>
+          </a:solidFill>
+          <a:prstDash val="solid"/>
+          <a:miter lim="800000"/>
+        </a:ln>
+        <a:ln w="12700" cap="flat" cmpd="sng" algn="ctr">
+          <a:solidFill>
+            <a:schemeClr val="phClr"/>
+          </a:solidFill>
+          <a:prstDash val="solid"/>
+          <a:miter lim="800000"/>
+        </a:ln>
+        <a:ln w="19050" cap="flat" cmpd="sng" algn="ctr">
+          <a:solidFill>
+            <a:schemeClr val="phClr"/>
+          </a:solidFill>
+          <a:prstDash val="solid"/>
+          <a:miter lim="800000"/>
+        </a:ln>
+      </a:lnStyleLst>
+      <a:effectStyleLst>
+        <a:effectStyle>
+          <a:effectLst/>
+        </a:effectStyle>
+        <a:effectStyle>
+          <a:effectLst/>
+        </a:effectStyle>
+        <a:effectStyle>
+          <a:effectLst>
+            <a:outerShdw blurRad="57150" dist="19050" dir="5400000" algn="ctr" rotWithShape="0">
+              <a:srgbClr val="000000">
+                <a:alpha val="63000"/>
+              </a:srgbClr>
+            </a:outerShdw>
+          </a:effectLst>
+        </a:effectStyle>
+      </a:effectStyleLst>
+      <a:bgFillStyleLst>
+        <a:solidFill>
+          <a:schemeClr val="phClr"/>
+        </a:solidFill>
+        <a:solidFill>
+          <a:schemeClr val="phClr">
+            <a:tint val="95000"/>
+            <a:satMod val="170000"/>
+          </a:schemeClr>
+        </a:solidFill>
+        <a:gradFill rotWithShape="1">
+          <a:gsLst>
+            <a:gs pos="0">
+              <a:schemeClr val="phClr">
+                <a:tint val="93000"/>
+                <a:satMod val="150000"/>
+                <a:shade val="98000"/>
+                <a:lumMod val="102000"/>
+              </a:schemeClr>
+            </a:gs>
+            <a:gs pos="50000">
+              <a:schemeClr val="phClr">
+                <a:tint val="98000"/>
+                <a:satMod val="130000"/>
+                <a:shade val="90000"/>
+                <a:lumMod val="103000"/>
+              </a:schemeClr>
+            </a:gs>
+            <a:gs pos="100000">
+              <a:schemeClr val="phClr">
+                <a:shade val="63000"/>
+                <a:satMod val="120000"/>
+              </a:schemeClr>
+            </a:gs>
+          </a:gsLst>
+          <a:lin ang="5400000" scaled="0"/>
+        </a:gradFill>
+      </a:bgFillStyleLst>
+    </a:fmtScheme>
+  </a:themeElements>
+  <a:objectDefaults/>
+  <a:extraClrSchemeLst/>
+  <a:extLst>
+    <a:ext uri="{05A4C25C-085E-4340-85A3-A5531E510DB2}">
+      <thm15:themeFamily xmlns:thm15="http://schemas.microsoft.com/office/thememl/2012/main" name="Office Theme" id="{62F939B6-93AF-4DB8-9C6B-D6C7DFDC589F}" vid="{4A3C46E8-61CC-4603-A589-7422A47A8E4A}"/>
+    </a:ext>
+  </a:extLst>
+</a:theme>
 </file>